--- a/static/ppts/G7_Math_Solving_Equations.pptx
+++ b/static/ppts/G7_Math_Solving_Equations.pptx
@@ -10,9 +10,12 @@
     <p:sldId id="258" r:id="rId4"/>
     <p:sldId id="259" r:id="rId5"/>
     <p:sldId id="260" r:id="rId6"/>
+    <p:sldId id="261" r:id="rId7"/>
+    <p:sldId id="262" r:id="rId8"/>
+    <p:sldId id="263" r:id="rId9"/>
   </p:sldIdLst>
   <p:notesMasterIdLst>
-    <p:notesMasterId r:id="rId7"/>
+    <p:notesMasterId r:id="rId10"/>
   </p:notesMasterIdLst>
   <p:sldSz cx="9144000" cy="5143500"/>
   <p:notesSz cx="5143500" cy="9144000"/>
@@ -900,6 +903,270 @@
 </p:notes>
 </file>
 
+<file path=ppt/notesSlides/notesSlide6.xml><?xml version="1.0" encoding="utf-8"?>
+<p:notes xmlns:a="http://schemas.openxmlformats.org/drawingml/2006/main" xmlns:r="http://schemas.openxmlformats.org/officeDocument/2006/relationships" xmlns:p="http://schemas.openxmlformats.org/presentationml/2006/main">
+  <p:cSld>
+    <p:spTree>
+      <p:nvGrpSpPr>
+        <p:cNvPr id="1" name=""/>
+        <p:cNvGrpSpPr/>
+        <p:nvPr/>
+      </p:nvGrpSpPr>
+      <p:grpSpPr>
+        <a:xfrm>
+          <a:off x="0" y="0"/>
+          <a:ext cx="0" cy="0"/>
+          <a:chOff x="0" y="0"/>
+          <a:chExt cx="0" cy="0"/>
+        </a:xfrm>
+      </p:grpSpPr>
+      <p:sp>
+        <p:nvSpPr>
+          <p:cNvPr id="2" name="Slide Image Placeholder 1"/>
+          <p:cNvSpPr>
+            <a:spLocks noGrp="1" noRot="1" noChangeAspect="1"/>
+          </p:cNvSpPr>
+          <p:nvPr>
+            <p:ph type="sldImg"/>
+          </p:nvPr>
+        </p:nvSpPr>
+        <p:spPr/>
+      </p:sp>
+      <p:sp>
+        <p:nvSpPr>
+          <p:cNvPr id="3" name="Notes Placeholder 2"/>
+          <p:cNvSpPr>
+            <a:spLocks noGrp="1"/>
+          </p:cNvSpPr>
+          <p:nvPr>
+            <p:ph type="body" idx="1"/>
+          </p:nvPr>
+        </p:nvSpPr>
+        <p:spPr/>
+        <p:txBody>
+          <a:bodyPr/>
+          <a:lstStyle/>
+          <a:p>
+            <a:r>
+              <a:rPr lang="en-US" dirty="0"/>
+              <a:t/>
+            </a:r>
+            <a:endParaRPr lang="en-US" dirty="0"/>
+          </a:p>
+        </p:txBody>
+      </p:sp>
+      <p:sp>
+        <p:nvSpPr>
+          <p:cNvPr id="4" name="Slide Number Placeholder 3"/>
+          <p:cNvSpPr>
+            <a:spLocks noGrp="1"/>
+          </p:cNvSpPr>
+          <p:nvPr>
+            <p:ph type="sldNum" sz="quarter" idx="10"/>
+          </p:nvPr>
+        </p:nvSpPr>
+        <p:spPr/>
+        <p:txBody>
+          <a:bodyPr/>
+          <a:lstStyle/>
+          <a:p>
+            <a:fld id="{F7021451-1387-4CA6-816F-3879F97B5CBC}" type="slidenum">
+              <a:rPr lang="en-US"/>
+              <a:t>6</a:t>
+            </a:fld>
+            <a:endParaRPr lang="en-US"/>
+          </a:p>
+        </p:txBody>
+      </p:sp>
+    </p:spTree>
+    <p:extLst>
+      <p:ext uri="{BB962C8B-B14F-4D97-AF65-F5344CB8AC3E}">
+        <p14:creationId xmlns:p14="http://schemas.microsoft.com/office/powerpoint/2010/main" val="1024086991"/>
+      </p:ext>
+    </p:extLst>
+  </p:cSld>
+  <p:clrMapOvr>
+    <a:masterClrMapping/>
+  </p:clrMapOvr>
+</p:notes>
+</file>
+
+<file path=ppt/notesSlides/notesSlide7.xml><?xml version="1.0" encoding="utf-8"?>
+<p:notes xmlns:a="http://schemas.openxmlformats.org/drawingml/2006/main" xmlns:r="http://schemas.openxmlformats.org/officeDocument/2006/relationships" xmlns:p="http://schemas.openxmlformats.org/presentationml/2006/main">
+  <p:cSld>
+    <p:spTree>
+      <p:nvGrpSpPr>
+        <p:cNvPr id="1" name=""/>
+        <p:cNvGrpSpPr/>
+        <p:nvPr/>
+      </p:nvGrpSpPr>
+      <p:grpSpPr>
+        <a:xfrm>
+          <a:off x="0" y="0"/>
+          <a:ext cx="0" cy="0"/>
+          <a:chOff x="0" y="0"/>
+          <a:chExt cx="0" cy="0"/>
+        </a:xfrm>
+      </p:grpSpPr>
+      <p:sp>
+        <p:nvSpPr>
+          <p:cNvPr id="2" name="Slide Image Placeholder 1"/>
+          <p:cNvSpPr>
+            <a:spLocks noGrp="1" noRot="1" noChangeAspect="1"/>
+          </p:cNvSpPr>
+          <p:nvPr>
+            <p:ph type="sldImg"/>
+          </p:nvPr>
+        </p:nvSpPr>
+        <p:spPr/>
+      </p:sp>
+      <p:sp>
+        <p:nvSpPr>
+          <p:cNvPr id="3" name="Notes Placeholder 2"/>
+          <p:cNvSpPr>
+            <a:spLocks noGrp="1"/>
+          </p:cNvSpPr>
+          <p:nvPr>
+            <p:ph type="body" idx="1"/>
+          </p:nvPr>
+        </p:nvSpPr>
+        <p:spPr/>
+        <p:txBody>
+          <a:bodyPr/>
+          <a:lstStyle/>
+          <a:p>
+            <a:r>
+              <a:rPr lang="en-US" dirty="0"/>
+              <a:t/>
+            </a:r>
+            <a:endParaRPr lang="en-US" dirty="0"/>
+          </a:p>
+        </p:txBody>
+      </p:sp>
+      <p:sp>
+        <p:nvSpPr>
+          <p:cNvPr id="4" name="Slide Number Placeholder 3"/>
+          <p:cNvSpPr>
+            <a:spLocks noGrp="1"/>
+          </p:cNvSpPr>
+          <p:nvPr>
+            <p:ph type="sldNum" sz="quarter" idx="10"/>
+          </p:nvPr>
+        </p:nvSpPr>
+        <p:spPr/>
+        <p:txBody>
+          <a:bodyPr/>
+          <a:lstStyle/>
+          <a:p>
+            <a:fld id="{F7021451-1387-4CA6-816F-3879F97B5CBC}" type="slidenum">
+              <a:rPr lang="en-US"/>
+              <a:t>7</a:t>
+            </a:fld>
+            <a:endParaRPr lang="en-US"/>
+          </a:p>
+        </p:txBody>
+      </p:sp>
+    </p:spTree>
+    <p:extLst>
+      <p:ext uri="{BB962C8B-B14F-4D97-AF65-F5344CB8AC3E}">
+        <p14:creationId xmlns:p14="http://schemas.microsoft.com/office/powerpoint/2010/main" val="1024086991"/>
+      </p:ext>
+    </p:extLst>
+  </p:cSld>
+  <p:clrMapOvr>
+    <a:masterClrMapping/>
+  </p:clrMapOvr>
+</p:notes>
+</file>
+
+<file path=ppt/notesSlides/notesSlide8.xml><?xml version="1.0" encoding="utf-8"?>
+<p:notes xmlns:a="http://schemas.openxmlformats.org/drawingml/2006/main" xmlns:r="http://schemas.openxmlformats.org/officeDocument/2006/relationships" xmlns:p="http://schemas.openxmlformats.org/presentationml/2006/main">
+  <p:cSld>
+    <p:spTree>
+      <p:nvGrpSpPr>
+        <p:cNvPr id="1" name=""/>
+        <p:cNvGrpSpPr/>
+        <p:nvPr/>
+      </p:nvGrpSpPr>
+      <p:grpSpPr>
+        <a:xfrm>
+          <a:off x="0" y="0"/>
+          <a:ext cx="0" cy="0"/>
+          <a:chOff x="0" y="0"/>
+          <a:chExt cx="0" cy="0"/>
+        </a:xfrm>
+      </p:grpSpPr>
+      <p:sp>
+        <p:nvSpPr>
+          <p:cNvPr id="2" name="Slide Image Placeholder 1"/>
+          <p:cNvSpPr>
+            <a:spLocks noGrp="1" noRot="1" noChangeAspect="1"/>
+          </p:cNvSpPr>
+          <p:nvPr>
+            <p:ph type="sldImg"/>
+          </p:nvPr>
+        </p:nvSpPr>
+        <p:spPr/>
+      </p:sp>
+      <p:sp>
+        <p:nvSpPr>
+          <p:cNvPr id="3" name="Notes Placeholder 2"/>
+          <p:cNvSpPr>
+            <a:spLocks noGrp="1"/>
+          </p:cNvSpPr>
+          <p:nvPr>
+            <p:ph type="body" idx="1"/>
+          </p:nvPr>
+        </p:nvSpPr>
+        <p:spPr/>
+        <p:txBody>
+          <a:bodyPr/>
+          <a:lstStyle/>
+          <a:p>
+            <a:r>
+              <a:rPr lang="en-US" dirty="0"/>
+              <a:t/>
+            </a:r>
+            <a:endParaRPr lang="en-US" dirty="0"/>
+          </a:p>
+        </p:txBody>
+      </p:sp>
+      <p:sp>
+        <p:nvSpPr>
+          <p:cNvPr id="4" name="Slide Number Placeholder 3"/>
+          <p:cNvSpPr>
+            <a:spLocks noGrp="1"/>
+          </p:cNvSpPr>
+          <p:nvPr>
+            <p:ph type="sldNum" sz="quarter" idx="10"/>
+          </p:nvPr>
+        </p:nvSpPr>
+        <p:spPr/>
+        <p:txBody>
+          <a:bodyPr/>
+          <a:lstStyle/>
+          <a:p>
+            <a:fld id="{F7021451-1387-4CA6-816F-3879F97B5CBC}" type="slidenum">
+              <a:rPr lang="en-US"/>
+              <a:t>8</a:t>
+            </a:fld>
+            <a:endParaRPr lang="en-US"/>
+          </a:p>
+        </p:txBody>
+      </p:sp>
+    </p:spTree>
+    <p:extLst>
+      <p:ext uri="{BB962C8B-B14F-4D97-AF65-F5344CB8AC3E}">
+        <p14:creationId xmlns:p14="http://schemas.microsoft.com/office/powerpoint/2010/main" val="1024086991"/>
+      </p:ext>
+    </p:extLst>
+  </p:cSld>
+  <p:clrMapOvr>
+    <a:masterClrMapping/>
+  </p:clrMapOvr>
+</p:notes>
+</file>
+
 <file path=ppt/slideLayouts/slideLayout1.xml><?xml version="1.0" encoding="utf-8"?>
 <p:sldLayout xmlns:a="http://schemas.openxmlformats.org/drawingml/2006/main" xmlns:r="http://schemas.openxmlformats.org/officeDocument/2006/relationships" xmlns:p="http://schemas.openxmlformats.org/presentationml/2006/main" preserve="1">
   <p:cSld name="DEFAULT">
@@ -1367,7 +1634,7 @@
               <a:buNone/>
             </a:pPr>
             <a:r>
-              <a:rPr lang="en-US" sz="1600" dirty="0">
+              <a:rPr lang="en-US" sz="1600" i="1" dirty="0">
                 <a:solidFill>
                   <a:srgbClr val="9B9690"/>
                 </a:solidFill>
@@ -1375,7 +1642,7 @@
                 <a:ea typeface="Calibri" pitchFamily="34" charset="-122"/>
                 <a:cs typeface="Calibri" pitchFamily="34" charset="-120"/>
               </a:rPr>
-              <a:t>Finding the value of the unknown</a:t>
+              <a:t>Finding the unknown value</a:t>
             </a:r>
             <a:endParaRPr lang="en-US" sz="1600" dirty="0"/>
           </a:p>
@@ -1406,7 +1673,7 @@
               <a:buNone/>
             </a:pPr>
             <a:r>
-              <a:rPr lang="en-US" sz="1100" dirty="0">
+              <a:rPr lang="en-US" sz="1200" dirty="0">
                 <a:solidFill>
                   <a:srgbClr val="6B6660"/>
                 </a:solidFill>
@@ -1414,9 +1681,9 @@
                 <a:ea typeface="Calibri" pitchFamily="34" charset="-122"/>
                 <a:cs typeface="Calibri" pitchFamily="34" charset="-120"/>
               </a:rPr>
-              <a:t>Mr Zocchi · NIS</a:t>
-            </a:r>
-            <a:endParaRPr lang="en-US" sz="1100" dirty="0"/>
+              <a:t>Mr Zocchi</a:t>
+            </a:r>
+            <a:endParaRPr lang="en-US" sz="1200" dirty="0"/>
           </a:p>
         </p:txBody>
       </p:sp>
@@ -1460,41 +1727,21 @@
             <a:avLst/>
           </a:prstGeom>
           <a:solidFill>
-            <a:srgbClr val="FAF8F5"/>
-          </a:solidFill>
-          <a:ln/>
-        </p:spPr>
-      </p:sp>
-      <p:sp>
-        <p:nvSpPr>
-          <p:cNvPr id="3" name="Shape 1"/>
-          <p:cNvSpPr/>
-          <p:nvPr/>
-        </p:nvSpPr>
-        <p:spPr>
-          <a:xfrm>
-            <a:off x="0" y="0"/>
-            <a:ext cx="9144000" cy="54864"/>
-          </a:xfrm>
-          <a:prstGeom prst="rect">
-            <a:avLst/>
-          </a:prstGeom>
-          <a:solidFill>
-            <a:srgbClr val="C8372D"/>
-          </a:solidFill>
-          <a:ln/>
-        </p:spPr>
-      </p:sp>
-      <p:sp>
-        <p:nvSpPr>
-          <p:cNvPr id="4" name="Text 2"/>
-          <p:cNvSpPr/>
-          <p:nvPr/>
-        </p:nvSpPr>
-        <p:spPr>
-          <a:xfrm>
-            <a:off x="640080" y="320040"/>
-            <a:ext cx="7863840" cy="640080"/>
+            <a:srgbClr val="111D35"/>
+          </a:solidFill>
+          <a:ln/>
+        </p:spPr>
+      </p:sp>
+      <p:sp>
+        <p:nvSpPr>
+          <p:cNvPr id="3" name="Text 1"/>
+          <p:cNvSpPr/>
+          <p:nvPr/>
+        </p:nvSpPr>
+        <p:spPr>
+          <a:xfrm>
+            <a:off x="6858000" y="182880"/>
+            <a:ext cx="2286000" cy="2743200"/>
           </a:xfrm>
           <a:prstGeom prst="rect">
             <a:avLst/>
@@ -1503,37 +1750,39 @@
           <a:ln/>
         </p:spPr>
         <p:txBody>
-          <a:bodyPr wrap="square" lIns="0" tIns="0" rIns="0" bIns="0" rtlCol="0" anchor="ctr"/>
-          <a:lstStyle/>
-          <a:p>
-            <a:pPr indent="0" marL="0">
+          <a:bodyPr wrap="square" rtlCol="0" anchor="ctr"/>
+          <a:lstStyle/>
+          <a:p>
+            <a:pPr algn="ctr" indent="0" marL="0">
               <a:buNone/>
             </a:pPr>
             <a:r>
-              <a:rPr lang="en-US" sz="2600" b="1" dirty="0">
-                <a:solidFill>
-                  <a:srgbClr val="1B2A4A"/>
+              <a:rPr lang="en-US" sz="16000" b="1" dirty="0">
+                <a:solidFill>
+                  <a:srgbClr val="C8372D">
+                    <a:alpha val="80000"/>
+                  </a:srgbClr>
                 </a:solidFill>
                 <a:latin typeface="Georgia" pitchFamily="34" charset="0"/>
                 <a:ea typeface="Georgia" pitchFamily="34" charset="-122"/>
                 <a:cs typeface="Georgia" pitchFamily="34" charset="-120"/>
               </a:rPr>
-              <a:t>What Is an Equation?</a:t>
-            </a:r>
-            <a:endParaRPr lang="en-US" sz="2600" dirty="0"/>
-          </a:p>
-        </p:txBody>
-      </p:sp>
-      <p:sp>
-        <p:nvSpPr>
-          <p:cNvPr id="5" name="Text 3"/>
-          <p:cNvSpPr/>
-          <p:nvPr/>
-        </p:nvSpPr>
-        <p:spPr>
-          <a:xfrm>
-            <a:off x="640080" y="1188720"/>
-            <a:ext cx="7863840" cy="3200400"/>
+              <a:t>?</a:t>
+            </a:r>
+            <a:endParaRPr lang="en-US" sz="16000" dirty="0"/>
+          </a:p>
+        </p:txBody>
+      </p:sp>
+      <p:sp>
+        <p:nvSpPr>
+          <p:cNvPr id="4" name="Text 2"/>
+          <p:cNvSpPr/>
+          <p:nvPr/>
+        </p:nvSpPr>
+        <p:spPr>
+          <a:xfrm>
+            <a:off x="731520" y="548640"/>
+            <a:ext cx="2743200" cy="365760"/>
           </a:xfrm>
           <a:prstGeom prst="rect">
             <a:avLst/>
@@ -1542,91 +1791,246 @@
           <a:ln/>
         </p:spPr>
         <p:txBody>
-          <a:bodyPr wrap="square" rtlCol="0" anchor="t"/>
-          <a:lstStyle/>
-          <a:p>
-            <a:pPr marL="342900" indent="-342900">
-              <a:lnSpc>
-                <a:spcPct val="140000"/>
-              </a:lnSpc>
-              <a:buSzPct val="100000"/>
-              <a:buChar char="•"/>
-            </a:pPr>
-            <a:r>
-              <a:rPr lang="en-US" sz="1500" dirty="0">
-                <a:solidFill>
-                  <a:srgbClr val="3D3A36"/>
+          <a:bodyPr wrap="square" rtlCol="0" anchor="ctr"/>
+          <a:lstStyle/>
+          <a:p>
+            <a:pPr indent="0" marL="0">
+              <a:buNone/>
+            </a:pPr>
+            <a:r>
+              <a:rPr lang="en-US" sz="1200" b="1" spc="400" kern="0" dirty="0">
+                <a:solidFill>
+                  <a:srgbClr val="C8372D"/>
                 </a:solidFill>
                 <a:latin typeface="Calibri" pitchFamily="34" charset="0"/>
                 <a:ea typeface="Calibri" pitchFamily="34" charset="-122"/>
                 <a:cs typeface="Calibri" pitchFamily="34" charset="-120"/>
               </a:rPr>
-              <a:t>An equation has an equals sign.</a:t>
-            </a:r>
-            <a:endParaRPr lang="en-US" sz="1500" dirty="0"/>
-          </a:p>
-          <a:p>
-            <a:pPr marL="342900" indent="-342900">
-              <a:lnSpc>
-                <a:spcPct val="140000"/>
-              </a:lnSpc>
-              <a:buSzPct val="100000"/>
-              <a:buChar char="•"/>
-            </a:pPr>
-            <a:r>
-              <a:rPr lang="en-US" sz="1500" dirty="0">
-                <a:solidFill>
-                  <a:srgbClr val="3D3A36"/>
+              <a:t>INQUIRY</a:t>
+            </a:r>
+            <a:endParaRPr lang="en-US" sz="1200" dirty="0"/>
+          </a:p>
+        </p:txBody>
+      </p:sp>
+      <p:sp>
+        <p:nvSpPr>
+          <p:cNvPr id="5" name="Text 3"/>
+          <p:cNvSpPr/>
+          <p:nvPr/>
+        </p:nvSpPr>
+        <p:spPr>
+          <a:xfrm>
+            <a:off x="731520" y="1005840"/>
+            <a:ext cx="6858000" cy="1463040"/>
+          </a:xfrm>
+          <a:prstGeom prst="rect">
+            <a:avLst/>
+          </a:prstGeom>
+          <a:noFill/>
+          <a:ln/>
+        </p:spPr>
+        <p:txBody>
+          <a:bodyPr wrap="square" rtlCol="0" anchor="t"/>
+          <a:lstStyle/>
+          <a:p>
+            <a:pPr indent="0" marL="0">
+              <a:buNone/>
+            </a:pPr>
+            <a:r>
+              <a:rPr lang="en-US" sz="2800" b="1" dirty="0">
+                <a:solidFill>
+                  <a:srgbClr val="FFFFFF"/>
+                </a:solidFill>
+                <a:latin typeface="Georgia" pitchFamily="34" charset="0"/>
+                <a:ea typeface="Georgia" pitchFamily="34" charset="-122"/>
+                <a:cs typeface="Georgia" pitchFamily="34" charset="-120"/>
+              </a:rPr>
+              <a:t>You spent ¥47 on lunch: a bowl of 鸭血粉丝汤 and 3 baozi. The soup was ¥20. How much was each baozi?</a:t>
+            </a:r>
+            <a:endParaRPr lang="en-US" sz="2800" dirty="0"/>
+          </a:p>
+        </p:txBody>
+      </p:sp>
+      <p:sp>
+        <p:nvSpPr>
+          <p:cNvPr id="6" name="Text 4"/>
+          <p:cNvSpPr/>
+          <p:nvPr/>
+        </p:nvSpPr>
+        <p:spPr>
+          <a:xfrm>
+            <a:off x="731520" y="2560320"/>
+            <a:ext cx="6858000" cy="548640"/>
+          </a:xfrm>
+          <a:prstGeom prst="rect">
+            <a:avLst/>
+          </a:prstGeom>
+          <a:noFill/>
+          <a:ln/>
+        </p:spPr>
+        <p:txBody>
+          <a:bodyPr wrap="square" rtlCol="0" anchor="ctr"/>
+          <a:lstStyle/>
+          <a:p>
+            <a:pPr indent="0" marL="0">
+              <a:buNone/>
+            </a:pPr>
+            <a:r>
+              <a:rPr lang="en-US" sz="1400" i="1" dirty="0">
+                <a:solidFill>
+                  <a:srgbClr val="9B9690"/>
                 </a:solidFill>
                 <a:latin typeface="Calibri" pitchFamily="34" charset="0"/>
                 <a:ea typeface="Calibri" pitchFamily="34" charset="-122"/>
                 <a:cs typeface="Calibri" pitchFamily="34" charset="-120"/>
               </a:rPr>
-              <a:t>To solve: find the value that makes both sides equal.</a:t>
-            </a:r>
-            <a:endParaRPr lang="en-US" sz="1500" dirty="0"/>
-          </a:p>
-          <a:p>
-            <a:pPr marL="342900" indent="-342900">
-              <a:lnSpc>
-                <a:spcPct val="140000"/>
-              </a:lnSpc>
-              <a:buSzPct val="100000"/>
-              <a:buChar char="•"/>
-            </a:pPr>
-            <a:r>
-              <a:rPr lang="en-US" sz="1500" dirty="0">
-                <a:solidFill>
-                  <a:srgbClr val="3D3A36"/>
+              <a:t>This is a real equation: 20 + 3b = 47. What is b?</a:t>
+            </a:r>
+            <a:endParaRPr lang="en-US" sz="1400" dirty="0"/>
+          </a:p>
+        </p:txBody>
+      </p:sp>
+      <p:sp>
+        <p:nvSpPr>
+          <p:cNvPr id="7" name="Shape 5"/>
+          <p:cNvSpPr/>
+          <p:nvPr/>
+        </p:nvSpPr>
+        <p:spPr>
+          <a:xfrm>
+            <a:off x="548640" y="3200400"/>
+            <a:ext cx="7315200" cy="1645920"/>
+          </a:xfrm>
+          <a:prstGeom prst="rect">
+            <a:avLst/>
+          </a:prstGeom>
+          <a:solidFill>
+            <a:srgbClr val="243660"/>
+          </a:solidFill>
+          <a:ln/>
+        </p:spPr>
+      </p:sp>
+      <p:sp>
+        <p:nvSpPr>
+          <p:cNvPr id="8" name="Text 6"/>
+          <p:cNvSpPr/>
+          <p:nvPr/>
+        </p:nvSpPr>
+        <p:spPr>
+          <a:xfrm>
+            <a:off x="731520" y="3246120"/>
+            <a:ext cx="3657600" cy="320040"/>
+          </a:xfrm>
+          <a:prstGeom prst="rect">
+            <a:avLst/>
+          </a:prstGeom>
+          <a:noFill/>
+          <a:ln/>
+        </p:spPr>
+        <p:txBody>
+          <a:bodyPr wrap="square" rtlCol="0" anchor="ctr"/>
+          <a:lstStyle/>
+          <a:p>
+            <a:pPr indent="0" marL="0">
+              <a:buNone/>
+            </a:pPr>
+            <a:r>
+              <a:rPr lang="en-US" sz="1100" b="1" spc="200" kern="0" dirty="0">
+                <a:solidFill>
+                  <a:srgbClr val="C8372D"/>
                 </a:solidFill>
                 <a:latin typeface="Calibri" pitchFamily="34" charset="0"/>
                 <a:ea typeface="Calibri" pitchFamily="34" charset="-122"/>
                 <a:cs typeface="Calibri" pitchFamily="34" charset="-120"/>
               </a:rPr>
-              <a:t>Key rule: whatever you do to one side, do to the other.</a:t>
-            </a:r>
-            <a:endParaRPr lang="en-US" sz="1500" dirty="0"/>
-          </a:p>
+              <a:t>Think — Pair — Share</a:t>
+            </a:r>
+            <a:endParaRPr lang="en-US" sz="1100" dirty="0"/>
+          </a:p>
+        </p:txBody>
+      </p:sp>
+      <p:sp>
+        <p:nvSpPr>
+          <p:cNvPr id="9" name="Text 7"/>
+          <p:cNvSpPr/>
+          <p:nvPr/>
+        </p:nvSpPr>
+        <p:spPr>
+          <a:xfrm>
+            <a:off x="731520" y="3566160"/>
+            <a:ext cx="6949440" cy="1188720"/>
+          </a:xfrm>
+          <a:prstGeom prst="rect">
+            <a:avLst/>
+          </a:prstGeom>
+          <a:noFill/>
+          <a:ln/>
+        </p:spPr>
+        <p:txBody>
+          <a:bodyPr wrap="square" rtlCol="0" anchor="ctr"/>
+          <a:lstStyle/>
           <a:p>
             <a:pPr marL="342900" indent="-342900">
-              <a:lnSpc>
-                <a:spcPct val="140000"/>
-              </a:lnSpc>
+              <a:spcAft>
+                <a:spcPts val="600"/>
+              </a:spcAft>
               <a:buSzPct val="100000"/>
               <a:buChar char="•"/>
             </a:pPr>
             <a:r>
-              <a:rPr lang="en-US" sz="1500" dirty="0">
-                <a:solidFill>
-                  <a:srgbClr val="3D3A36"/>
+              <a:rPr lang="en-US" sz="1400" dirty="0">
+                <a:solidFill>
+                  <a:srgbClr val="E5E2DC"/>
                 </a:solidFill>
                 <a:latin typeface="Calibri" pitchFamily="34" charset="0"/>
                 <a:ea typeface="Calibri" pitchFamily="34" charset="-122"/>
                 <a:cs typeface="Calibri" pitchFamily="34" charset="-120"/>
               </a:rPr>
-              <a:t>Think of it like a balance scale — keep it balanced!</a:t>
-            </a:r>
-            <a:endParaRPr lang="en-US" sz="1500" dirty="0"/>
+              <a:t>What information do you know?</a:t>
+            </a:r>
+            <a:endParaRPr lang="en-US" sz="1400" dirty="0"/>
+          </a:p>
+          <a:p>
+            <a:pPr marL="342900" indent="-342900">
+              <a:spcAft>
+                <a:spcPts val="600"/>
+              </a:spcAft>
+              <a:buSzPct val="100000"/>
+              <a:buChar char="•"/>
+            </a:pPr>
+            <a:r>
+              <a:rPr lang="en-US" sz="1400" dirty="0">
+                <a:solidFill>
+                  <a:srgbClr val="E5E2DC"/>
+                </a:solidFill>
+                <a:latin typeface="Calibri" pitchFamily="34" charset="0"/>
+                <a:ea typeface="Calibri" pitchFamily="34" charset="-122"/>
+                <a:cs typeface="Calibri" pitchFamily="34" charset="-120"/>
+              </a:rPr>
+              <a:t>What are you trying to find?</a:t>
+            </a:r>
+            <a:endParaRPr lang="en-US" sz="1400" dirty="0"/>
+          </a:p>
+          <a:p>
+            <a:pPr marL="342900" indent="-342900">
+              <a:spcAft>
+                <a:spcPts val="600"/>
+              </a:spcAft>
+              <a:buSzPct val="100000"/>
+              <a:buChar char="•"/>
+            </a:pPr>
+            <a:r>
+              <a:rPr lang="en-US" sz="1400" dirty="0">
+                <a:solidFill>
+                  <a:srgbClr val="E5E2DC"/>
+                </a:solidFill>
+                <a:latin typeface="Calibri" pitchFamily="34" charset="0"/>
+                <a:ea typeface="Calibri" pitchFamily="34" charset="-122"/>
+                <a:cs typeface="Calibri" pitchFamily="34" charset="-120"/>
+              </a:rPr>
+              <a:t>How would you isolate the unknown?</a:t>
+            </a:r>
+            <a:endParaRPr lang="en-US" sz="1400" dirty="0"/>
           </a:p>
         </p:txBody>
       </p:sp>
@@ -1641,6 +2045,13 @@
 <file path=ppt/slides/slide3.xml><?xml version="1.0" encoding="utf-8"?>
 <p:sld xmlns:a="http://schemas.openxmlformats.org/drawingml/2006/main" xmlns:r="http://schemas.openxmlformats.org/officeDocument/2006/relationships" xmlns:p="http://schemas.openxmlformats.org/presentationml/2006/main">
   <p:cSld name="Slide 3">
+    <p:bg>
+      <p:bgPr>
+        <a:solidFill>
+          <a:srgbClr val="FAF8F5"/>
+        </a:solidFill>
+      </p:bgPr>
+    </p:bg>
     <p:spTree>
       <p:nvGrpSpPr>
         <p:cNvPr id="1" name=""/>
@@ -1664,13 +2075,13 @@
         <p:spPr>
           <a:xfrm>
             <a:off x="0" y="0"/>
-            <a:ext cx="9144000" cy="5143500"/>
-          </a:xfrm>
-          <a:prstGeom prst="rect">
-            <a:avLst/>
-          </a:prstGeom>
-          <a:solidFill>
-            <a:srgbClr val="FAF8F5"/>
+            <a:ext cx="9144000" cy="822960"/>
+          </a:xfrm>
+          <a:prstGeom prst="rect">
+            <a:avLst/>
+          </a:prstGeom>
+          <a:solidFill>
+            <a:srgbClr val="FFFFFF"/>
           </a:solidFill>
           <a:ln/>
         </p:spPr>
@@ -1683,8 +2094,8 @@
         </p:nvSpPr>
         <p:spPr>
           <a:xfrm>
-            <a:off x="0" y="0"/>
-            <a:ext cx="9144000" cy="54864"/>
+            <a:off x="0" y="795528"/>
+            <a:ext cx="9144000" cy="27432"/>
           </a:xfrm>
           <a:prstGeom prst="rect">
             <a:avLst/>
@@ -1703,7 +2114,7 @@
         </p:nvSpPr>
         <p:spPr>
           <a:xfrm>
-            <a:off x="640080" y="320040"/>
+            <a:off x="640080" y="91440"/>
             <a:ext cx="7863840" cy="640080"/>
           </a:xfrm>
           <a:prstGeom prst="rect">
@@ -1720,7 +2131,7 @@
               <a:buNone/>
             </a:pPr>
             <a:r>
-              <a:rPr lang="en-US" sz="2600" b="1" dirty="0">
+              <a:rPr lang="en-US" sz="2200" b="1" dirty="0">
                 <a:solidFill>
                   <a:srgbClr val="1B2A4A"/>
                 </a:solidFill>
@@ -1728,9 +2139,9 @@
                 <a:ea typeface="Georgia" pitchFamily="34" charset="-122"/>
                 <a:cs typeface="Georgia" pitchFamily="34" charset="-120"/>
               </a:rPr>
-              <a:t>One-Step Equations</a:t>
-            </a:r>
-            <a:endParaRPr lang="en-US" sz="2600" dirty="0"/>
+              <a:t>What Is an Equation?</a:t>
+            </a:r>
+            <a:endParaRPr lang="en-US" sz="2200" dirty="0"/>
           </a:p>
         </p:txBody>
       </p:sp>
@@ -1742,8 +2153,8 @@
         </p:nvSpPr>
         <p:spPr>
           <a:xfrm>
-            <a:off x="640080" y="1188720"/>
-            <a:ext cx="7863840" cy="3200400"/>
+            <a:off x="640080" y="1005840"/>
+            <a:ext cx="7863840" cy="2926080"/>
           </a:xfrm>
           <a:prstGeom prst="rect">
             <a:avLst/>
@@ -1752,18 +2163,18 @@
           <a:ln/>
         </p:spPr>
         <p:txBody>
-          <a:bodyPr wrap="square" rtlCol="0" anchor="t"/>
+          <a:bodyPr wrap="square" rtlCol="0" anchor="ctr"/>
           <a:lstStyle/>
           <a:p>
             <a:pPr marL="342900" indent="-342900">
-              <a:lnSpc>
-                <a:spcPct val="140000"/>
-              </a:lnSpc>
+              <a:spcAft>
+                <a:spcPts val="800"/>
+              </a:spcAft>
               <a:buSzPct val="100000"/>
               <a:buChar char="•"/>
             </a:pPr>
             <a:r>
-              <a:rPr lang="en-US" sz="1500" dirty="0">
+              <a:rPr lang="en-US" sz="1600" dirty="0">
                 <a:solidFill>
                   <a:srgbClr val="3D3A36"/>
                 </a:solidFill>
@@ -1771,20 +2182,20 @@
                 <a:ea typeface="Calibri" pitchFamily="34" charset="-122"/>
                 <a:cs typeface="Calibri" pitchFamily="34" charset="-120"/>
               </a:rPr>
-              <a:t>x + 7 = 15</a:t>
-            </a:r>
-            <a:endParaRPr lang="en-US" sz="1500" dirty="0"/>
+              <a:t>Has an EQUALS SIGN — two balanced sides.</a:t>
+            </a:r>
+            <a:endParaRPr lang="en-US" sz="1600" dirty="0"/>
           </a:p>
           <a:p>
             <a:pPr marL="342900" indent="-342900">
-              <a:lnSpc>
-                <a:spcPct val="140000"/>
-              </a:lnSpc>
+              <a:spcAft>
+                <a:spcPts val="800"/>
+              </a:spcAft>
               <a:buSzPct val="100000"/>
               <a:buChar char="•"/>
             </a:pPr>
             <a:r>
-              <a:rPr lang="en-US" sz="1500" dirty="0">
+              <a:rPr lang="en-US" sz="1600" dirty="0">
                 <a:solidFill>
                   <a:srgbClr val="3D3A36"/>
                 </a:solidFill>
@@ -1792,20 +2203,20 @@
                 <a:ea typeface="Calibri" pitchFamily="34" charset="-122"/>
                 <a:cs typeface="Calibri" pitchFamily="34" charset="-120"/>
               </a:rPr>
-              <a:t>Subtract 7 from both sides:</a:t>
-            </a:r>
-            <a:endParaRPr lang="en-US" sz="1500" dirty="0"/>
+              <a:t>Think of a balance scale.</a:t>
+            </a:r>
+            <a:endParaRPr lang="en-US" sz="1600" dirty="0"/>
           </a:p>
           <a:p>
             <a:pPr marL="342900" indent="-342900">
-              <a:lnSpc>
-                <a:spcPct val="140000"/>
-              </a:lnSpc>
+              <a:spcAft>
+                <a:spcPts val="800"/>
+              </a:spcAft>
               <a:buSzPct val="100000"/>
               <a:buChar char="•"/>
             </a:pPr>
             <a:r>
-              <a:rPr lang="en-US" sz="1500" dirty="0">
+              <a:rPr lang="en-US" sz="1600" dirty="0">
                 <a:solidFill>
                   <a:srgbClr val="3D3A36"/>
                 </a:solidFill>
@@ -1813,20 +2224,20 @@
                 <a:ea typeface="Calibri" pitchFamily="34" charset="-122"/>
                 <a:cs typeface="Calibri" pitchFamily="34" charset="-120"/>
               </a:rPr>
-              <a:t>x + 7 - 7 = 15 - 7</a:t>
-            </a:r>
-            <a:endParaRPr lang="en-US" sz="1500" dirty="0"/>
+              <a:t>Solving = finding the value that makes it true.</a:t>
+            </a:r>
+            <a:endParaRPr lang="en-US" sz="1600" dirty="0"/>
           </a:p>
           <a:p>
             <a:pPr marL="342900" indent="-342900">
-              <a:lnSpc>
-                <a:spcPct val="140000"/>
-              </a:lnSpc>
+              <a:spcAft>
+                <a:spcPts val="800"/>
+              </a:spcAft>
               <a:buSzPct val="100000"/>
               <a:buChar char="•"/>
             </a:pPr>
             <a:r>
-              <a:rPr lang="en-US" sz="1500" dirty="0">
+              <a:rPr lang="en-US" sz="1600" dirty="0">
                 <a:solidFill>
                   <a:srgbClr val="3D3A36"/>
                 </a:solidFill>
@@ -1834,9 +2245,95 @@
                 <a:ea typeface="Calibri" pitchFamily="34" charset="-122"/>
                 <a:cs typeface="Calibri" pitchFamily="34" charset="-120"/>
               </a:rPr>
-              <a:t>x = 8 ✓</a:t>
-            </a:r>
-            <a:endParaRPr lang="en-US" sz="1500" dirty="0"/>
+              <a:t>3x + 2 = 14 — what value of x balances?</a:t>
+            </a:r>
+            <a:endParaRPr lang="en-US" sz="1600" dirty="0"/>
+          </a:p>
+        </p:txBody>
+      </p:sp>
+      <p:sp>
+        <p:nvSpPr>
+          <p:cNvPr id="6" name="Shape 4"/>
+          <p:cNvSpPr/>
+          <p:nvPr/>
+        </p:nvSpPr>
+        <p:spPr>
+          <a:xfrm>
+            <a:off x="640080" y="4114800"/>
+            <a:ext cx="7863840" cy="731520"/>
+          </a:xfrm>
+          <a:prstGeom prst="rect">
+            <a:avLst/>
+          </a:prstGeom>
+          <a:solidFill>
+            <a:srgbClr val="E8F5F3"/>
+          </a:solidFill>
+          <a:ln/>
+          <a:effectLst>
+            <a:outerShdw sx="100000" sy="100000" kx="0" ky="0" algn="bl" rotWithShape="0" blurRad="76200" dist="25400" dir="8100000">
+              <a:srgbClr val="000000">
+                <a:alpha val="12000"/>
+              </a:srgbClr>
+            </a:outerShdw>
+          </a:effectLst>
+        </p:spPr>
+      </p:sp>
+      <p:sp>
+        <p:nvSpPr>
+          <p:cNvPr id="7" name="Shape 5"/>
+          <p:cNvSpPr/>
+          <p:nvPr/>
+        </p:nvSpPr>
+        <p:spPr>
+          <a:xfrm>
+            <a:off x="640080" y="4114800"/>
+            <a:ext cx="64008" cy="731520"/>
+          </a:xfrm>
+          <a:prstGeom prst="rect">
+            <a:avLst/>
+          </a:prstGeom>
+          <a:solidFill>
+            <a:srgbClr val="C8372D"/>
+          </a:solidFill>
+          <a:ln/>
+        </p:spPr>
+      </p:sp>
+      <p:sp>
+        <p:nvSpPr>
+          <p:cNvPr id="8" name="Text 6"/>
+          <p:cNvSpPr/>
+          <p:nvPr/>
+        </p:nvSpPr>
+        <p:spPr>
+          <a:xfrm>
+            <a:off x="914400" y="4160520"/>
+            <a:ext cx="7406640" cy="640080"/>
+          </a:xfrm>
+          <a:prstGeom prst="rect">
+            <a:avLst/>
+          </a:prstGeom>
+          <a:noFill/>
+          <a:ln/>
+        </p:spPr>
+        <p:txBody>
+          <a:bodyPr wrap="square" rtlCol="0" anchor="ctr"/>
+          <a:lstStyle/>
+          <a:p>
+            <a:pPr indent="0" marL="0">
+              <a:buNone/>
+            </a:pPr>
+            <a:r>
+              <a:rPr lang="en-US" sz="1300" i="1" dirty="0">
+                <a:solidFill>
+                  <a:srgbClr val="3D3A36"/>
+                </a:solidFill>
+                <a:latin typeface="Calibri" pitchFamily="34" charset="0"/>
+                <a:ea typeface="Calibri" pitchFamily="34" charset="-122"/>
+                <a:cs typeface="Calibri" pitchFamily="34" charset="-120"/>
+              </a:rPr>
+              <a:t>Whatever you do to one side, you MUST do to the other.</a:t>
+            </a:r>
+            <a:endParaRPr lang="en-US" sz="1300" dirty="0"/>
           </a:p>
         </p:txBody>
       </p:sp>
@@ -1851,6 +2348,13 @@
 <file path=ppt/slides/slide4.xml><?xml version="1.0" encoding="utf-8"?>
 <p:sld xmlns:a="http://schemas.openxmlformats.org/drawingml/2006/main" xmlns:r="http://schemas.openxmlformats.org/officeDocument/2006/relationships" xmlns:p="http://schemas.openxmlformats.org/presentationml/2006/main">
   <p:cSld name="Slide 4">
+    <p:bg>
+      <p:bgPr>
+        <a:solidFill>
+          <a:srgbClr val="FAF8F5"/>
+        </a:solidFill>
+      </p:bgPr>
+    </p:bg>
     <p:spTree>
       <p:nvGrpSpPr>
         <p:cNvPr id="1" name=""/>
@@ -1874,13 +2378,13 @@
         <p:spPr>
           <a:xfrm>
             <a:off x="0" y="0"/>
-            <a:ext cx="9144000" cy="5143500"/>
-          </a:xfrm>
-          <a:prstGeom prst="rect">
-            <a:avLst/>
-          </a:prstGeom>
-          <a:solidFill>
-            <a:srgbClr val="FAF8F5"/>
+            <a:ext cx="9144000" cy="822960"/>
+          </a:xfrm>
+          <a:prstGeom prst="rect">
+            <a:avLst/>
+          </a:prstGeom>
+          <a:solidFill>
+            <a:srgbClr val="FFFFFF"/>
           </a:solidFill>
           <a:ln/>
         </p:spPr>
@@ -1893,8 +2397,8 @@
         </p:nvSpPr>
         <p:spPr>
           <a:xfrm>
-            <a:off x="0" y="0"/>
-            <a:ext cx="9144000" cy="54864"/>
+            <a:off x="0" y="795528"/>
+            <a:ext cx="9144000" cy="27432"/>
           </a:xfrm>
           <a:prstGeom prst="rect">
             <a:avLst/>
@@ -1913,7 +2417,7 @@
         </p:nvSpPr>
         <p:spPr>
           <a:xfrm>
-            <a:off x="640080" y="320040"/>
+            <a:off x="640080" y="91440"/>
             <a:ext cx="7863840" cy="640080"/>
           </a:xfrm>
           <a:prstGeom prst="rect">
@@ -1930,7 +2434,7 @@
               <a:buNone/>
             </a:pPr>
             <a:r>
-              <a:rPr lang="en-US" sz="2600" b="1" dirty="0">
+              <a:rPr lang="en-US" sz="2200" b="1" dirty="0">
                 <a:solidFill>
                   <a:srgbClr val="1B2A4A"/>
                 </a:solidFill>
@@ -1938,9 +2442,9 @@
                 <a:ea typeface="Georgia" pitchFamily="34" charset="-122"/>
                 <a:cs typeface="Georgia" pitchFamily="34" charset="-120"/>
               </a:rPr>
-              <a:t>Two-Step Equations</a:t>
-            </a:r>
-            <a:endParaRPr lang="en-US" sz="2600" dirty="0"/>
+              <a:t>One-Step Equations</a:t>
+            </a:r>
+            <a:endParaRPr lang="en-US" sz="2200" dirty="0"/>
           </a:p>
         </p:txBody>
       </p:sp>
@@ -1952,8 +2456,8 @@
         </p:nvSpPr>
         <p:spPr>
           <a:xfrm>
-            <a:off x="640080" y="1188720"/>
-            <a:ext cx="7863840" cy="3200400"/>
+            <a:off x="640080" y="1005840"/>
+            <a:ext cx="7863840" cy="2926080"/>
           </a:xfrm>
           <a:prstGeom prst="rect">
             <a:avLst/>
@@ -1962,18 +2466,18 @@
           <a:ln/>
         </p:spPr>
         <p:txBody>
-          <a:bodyPr wrap="square" rtlCol="0" anchor="t"/>
+          <a:bodyPr wrap="square" rtlCol="0" anchor="ctr"/>
           <a:lstStyle/>
           <a:p>
             <a:pPr marL="342900" indent="-342900">
-              <a:lnSpc>
-                <a:spcPct val="140000"/>
-              </a:lnSpc>
+              <a:spcAft>
+                <a:spcPts val="800"/>
+              </a:spcAft>
               <a:buSzPct val="100000"/>
               <a:buChar char="•"/>
             </a:pPr>
             <a:r>
-              <a:rPr lang="en-US" sz="1500" dirty="0">
+              <a:rPr lang="en-US" sz="1600" dirty="0">
                 <a:solidFill>
                   <a:srgbClr val="3D3A36"/>
                 </a:solidFill>
@@ -1981,20 +2485,20 @@
                 <a:ea typeface="Calibri" pitchFamily="34" charset="-122"/>
                 <a:cs typeface="Calibri" pitchFamily="34" charset="-120"/>
               </a:rPr>
-              <a:t>3x + 4 = 19</a:t>
-            </a:r>
-            <a:endParaRPr lang="en-US" sz="1500" dirty="0"/>
+              <a:t>x + 5 = 12 → subtract 5 → x = 7</a:t>
+            </a:r>
+            <a:endParaRPr lang="en-US" sz="1600" dirty="0"/>
           </a:p>
           <a:p>
             <a:pPr marL="342900" indent="-342900">
-              <a:lnSpc>
-                <a:spcPct val="140000"/>
-              </a:lnSpc>
+              <a:spcAft>
+                <a:spcPts val="800"/>
+              </a:spcAft>
               <a:buSzPct val="100000"/>
               <a:buChar char="•"/>
             </a:pPr>
             <a:r>
-              <a:rPr lang="en-US" sz="1500" dirty="0">
+              <a:rPr lang="en-US" sz="1600" dirty="0">
                 <a:solidFill>
                   <a:srgbClr val="3D3A36"/>
                 </a:solidFill>
@@ -2002,20 +2506,20 @@
                 <a:ea typeface="Calibri" pitchFamily="34" charset="-122"/>
                 <a:cs typeface="Calibri" pitchFamily="34" charset="-120"/>
               </a:rPr>
-              <a:t>Step 1: Subtract 4 → 3x = 15</a:t>
-            </a:r>
-            <a:endParaRPr lang="en-US" sz="1500" dirty="0"/>
+              <a:t>x − 3 = 10 → add 3 → x = 13</a:t>
+            </a:r>
+            <a:endParaRPr lang="en-US" sz="1600" dirty="0"/>
           </a:p>
           <a:p>
             <a:pPr marL="342900" indent="-342900">
-              <a:lnSpc>
-                <a:spcPct val="140000"/>
-              </a:lnSpc>
+              <a:spcAft>
+                <a:spcPts val="800"/>
+              </a:spcAft>
               <a:buSzPct val="100000"/>
               <a:buChar char="•"/>
             </a:pPr>
             <a:r>
-              <a:rPr lang="en-US" sz="1500" dirty="0">
+              <a:rPr lang="en-US" sz="1600" dirty="0">
                 <a:solidFill>
                   <a:srgbClr val="3D3A36"/>
                 </a:solidFill>
@@ -2023,20 +2527,20 @@
                 <a:ea typeface="Calibri" pitchFamily="34" charset="-122"/>
                 <a:cs typeface="Calibri" pitchFamily="34" charset="-120"/>
               </a:rPr>
-              <a:t>Step 2: Divide by 3 → x = 5</a:t>
-            </a:r>
-            <a:endParaRPr lang="en-US" sz="1500" dirty="0"/>
+              <a:t>4x = 20 → divide by 4 → x = 5</a:t>
+            </a:r>
+            <a:endParaRPr lang="en-US" sz="1600" dirty="0"/>
           </a:p>
           <a:p>
             <a:pPr marL="342900" indent="-342900">
-              <a:lnSpc>
-                <a:spcPct val="140000"/>
-              </a:lnSpc>
+              <a:spcAft>
+                <a:spcPts val="800"/>
+              </a:spcAft>
               <a:buSzPct val="100000"/>
               <a:buChar char="•"/>
             </a:pPr>
             <a:r>
-              <a:rPr lang="en-US" sz="1500" dirty="0">
+              <a:rPr lang="en-US" sz="1600" dirty="0">
                 <a:solidFill>
                   <a:srgbClr val="3D3A36"/>
                 </a:solidFill>
@@ -2044,70 +2548,30 @@
                 <a:ea typeface="Calibri" pitchFamily="34" charset="-122"/>
                 <a:cs typeface="Calibri" pitchFamily="34" charset="-120"/>
               </a:rPr>
-              <a:t>Always deal with the constant first, then the coefficient.</a:t>
-            </a:r>
-            <a:endParaRPr lang="en-US" sz="1500" dirty="0"/>
-          </a:p>
-        </p:txBody>
-      </p:sp>
-      <p:sp>
-        <p:nvSpPr>
-          <p:cNvPr id="6" name="Shape 4"/>
-          <p:cNvSpPr/>
-          <p:nvPr/>
-        </p:nvSpPr>
-        <p:spPr>
-          <a:xfrm>
-            <a:off x="640080" y="4206240"/>
-            <a:ext cx="7863840" cy="640080"/>
-          </a:xfrm>
-          <a:prstGeom prst="roundRect">
-            <a:avLst>
-              <a:gd name="adj" fmla="val 11429"/>
-            </a:avLst>
-          </a:prstGeom>
-          <a:solidFill>
-            <a:srgbClr val="E8F5F3"/>
-          </a:solidFill>
-          <a:ln/>
-        </p:spPr>
-      </p:sp>
-      <p:sp>
-        <p:nvSpPr>
-          <p:cNvPr id="7" name="Text 5"/>
-          <p:cNvSpPr/>
-          <p:nvPr/>
-        </p:nvSpPr>
-        <p:spPr>
-          <a:xfrm>
-            <a:off x="822960" y="4251960"/>
-            <a:ext cx="7498080" cy="548640"/>
-          </a:xfrm>
-          <a:prstGeom prst="rect">
-            <a:avLst/>
-          </a:prstGeom>
-          <a:noFill/>
-          <a:ln/>
-        </p:spPr>
-        <p:txBody>
-          <a:bodyPr wrap="square" rtlCol="0" anchor="ctr"/>
-          <a:lstStyle/>
-          <a:p>
-            <a:pPr indent="0" marL="0">
-              <a:buNone/>
-            </a:pPr>
-            <a:r>
-              <a:rPr lang="en-US" sz="1200" i="1" dirty="0">
-                <a:solidFill>
-                  <a:srgbClr val="2A9D8F"/>
+              <a:t>x ÷ 2 = 6 → multiply by 2 → x = 12</a:t>
+            </a:r>
+            <a:endParaRPr lang="en-US" sz="1600" dirty="0"/>
+          </a:p>
+          <a:p>
+            <a:pPr marL="342900" indent="-342900">
+              <a:spcAft>
+                <a:spcPts val="800"/>
+              </a:spcAft>
+              <a:buSzPct val="100000"/>
+              <a:buChar char="•"/>
+            </a:pPr>
+            <a:r>
+              <a:rPr lang="en-US" sz="1600" dirty="0">
+                <a:solidFill>
+                  <a:srgbClr val="3D3A36"/>
                 </a:solidFill>
                 <a:latin typeface="Calibri" pitchFamily="34" charset="0"/>
                 <a:ea typeface="Calibri" pitchFamily="34" charset="-122"/>
                 <a:cs typeface="Calibri" pitchFamily="34" charset="-120"/>
               </a:rPr>
-              <a:t>Check: 3(5) + 4 = 15 + 4 = 19 ✓</a:t>
-            </a:r>
-            <a:endParaRPr lang="en-US" sz="1200" dirty="0"/>
+              <a:t>Use the INVERSE (opposite) operation.</a:t>
+            </a:r>
+            <a:endParaRPr lang="en-US" sz="1600" dirty="0"/>
           </a:p>
         </p:txBody>
       </p:sp>
@@ -2122,6 +2586,13 @@
 <file path=ppt/slides/slide5.xml><?xml version="1.0" encoding="utf-8"?>
 <p:sld xmlns:a="http://schemas.openxmlformats.org/drawingml/2006/main" xmlns:r="http://schemas.openxmlformats.org/officeDocument/2006/relationships" xmlns:p="http://schemas.openxmlformats.org/presentationml/2006/main">
   <p:cSld name="Slide 5">
+    <p:bg>
+      <p:bgPr>
+        <a:solidFill>
+          <a:srgbClr val="FAF8F5"/>
+        </a:solidFill>
+      </p:bgPr>
+    </p:bg>
     <p:spTree>
       <p:nvGrpSpPr>
         <p:cNvPr id="1" name=""/>
@@ -2145,13 +2616,13 @@
         <p:spPr>
           <a:xfrm>
             <a:off x="0" y="0"/>
-            <a:ext cx="9144000" cy="5143500"/>
-          </a:xfrm>
-          <a:prstGeom prst="rect">
-            <a:avLst/>
-          </a:prstGeom>
-          <a:solidFill>
-            <a:srgbClr val="1B2A4A"/>
+            <a:ext cx="9144000" cy="822960"/>
+          </a:xfrm>
+          <a:prstGeom prst="rect">
+            <a:avLst/>
+          </a:prstGeom>
+          <a:solidFill>
+            <a:srgbClr val="FFFFFF"/>
           </a:solidFill>
           <a:ln/>
         </p:spPr>
@@ -2164,8 +2635,8 @@
         </p:nvSpPr>
         <p:spPr>
           <a:xfrm>
-            <a:off x="0" y="4777740"/>
-            <a:ext cx="9144000" cy="365760"/>
+            <a:off x="0" y="795528"/>
+            <a:ext cx="9144000" cy="27432"/>
           </a:xfrm>
           <a:prstGeom prst="rect">
             <a:avLst/>
@@ -2184,8 +2655,8 @@
         </p:nvSpPr>
         <p:spPr>
           <a:xfrm>
-            <a:off x="731520" y="1371600"/>
-            <a:ext cx="7680960" cy="914400"/>
+            <a:off x="640080" y="91440"/>
+            <a:ext cx="7863840" cy="640080"/>
           </a:xfrm>
           <a:prstGeom prst="rect">
             <a:avLst/>
@@ -2194,24 +2665,24 @@
           <a:ln/>
         </p:spPr>
         <p:txBody>
-          <a:bodyPr wrap="square" rtlCol="0" anchor="ctr"/>
-          <a:lstStyle/>
-          <a:p>
-            <a:pPr algn="ctr" indent="0" marL="0">
+          <a:bodyPr wrap="square" lIns="0" tIns="0" rIns="0" bIns="0" rtlCol="0" anchor="ctr"/>
+          <a:lstStyle/>
+          <a:p>
+            <a:pPr indent="0" marL="0">
               <a:buNone/>
             </a:pPr>
             <a:r>
-              <a:rPr lang="en-US" sz="3600" b="1" dirty="0">
-                <a:solidFill>
-                  <a:srgbClr val="FFFFFF"/>
+              <a:rPr lang="en-US" sz="2200" b="1" dirty="0">
+                <a:solidFill>
+                  <a:srgbClr val="1B2A4A"/>
                 </a:solidFill>
                 <a:latin typeface="Georgia" pitchFamily="34" charset="0"/>
                 <a:ea typeface="Georgia" pitchFamily="34" charset="-122"/>
                 <a:cs typeface="Georgia" pitchFamily="34" charset="-120"/>
               </a:rPr>
-              <a:t>Review &amp; Practise</a:t>
-            </a:r>
-            <a:endParaRPr lang="en-US" sz="3600" dirty="0"/>
+              <a:t>Two-Step Equations</a:t>
+            </a:r>
+            <a:endParaRPr lang="en-US" sz="2200" dirty="0"/>
           </a:p>
         </p:txBody>
       </p:sp>
@@ -2223,8 +2694,8 @@
         </p:nvSpPr>
         <p:spPr>
           <a:xfrm>
-            <a:off x="731520" y="2468880"/>
-            <a:ext cx="7680960" cy="548640"/>
+            <a:off x="640080" y="1005840"/>
+            <a:ext cx="7863840" cy="2926080"/>
           </a:xfrm>
           <a:prstGeom prst="rect">
             <a:avLst/>
@@ -2236,60 +2707,1454 @@
           <a:bodyPr wrap="square" rtlCol="0" anchor="ctr"/>
           <a:lstStyle/>
           <a:p>
-            <a:pPr algn="ctr" indent="0" marL="0">
-              <a:buNone/>
-            </a:pPr>
-            <a:r>
-              <a:rPr lang="en-US" sz="1800" dirty="0">
-                <a:solidFill>
-                  <a:srgbClr val="C8372D"/>
+            <a:pPr marL="342900" indent="-342900">
+              <a:spcAft>
+                <a:spcPts val="800"/>
+              </a:spcAft>
+              <a:buSzPct val="100000"/>
+              <a:buChar char="•"/>
+            </a:pPr>
+            <a:r>
+              <a:rPr lang="en-US" sz="1600" dirty="0">
+                <a:solidFill>
+                  <a:srgbClr val="3D3A36"/>
                 </a:solidFill>
                 <a:latin typeface="Calibri" pitchFamily="34" charset="0"/>
                 <a:ea typeface="Calibri" pitchFamily="34" charset="-122"/>
                 <a:cs typeface="Calibri" pitchFamily="34" charset="-120"/>
               </a:rPr>
-              <a:t>learnlattice.org/students/exam-revision</a:t>
-            </a:r>
-            <a:endParaRPr lang="en-US" sz="1800" dirty="0"/>
-          </a:p>
-        </p:txBody>
-      </p:sp>
-      <p:sp>
-        <p:nvSpPr>
-          <p:cNvPr id="6" name="Text 4"/>
-          <p:cNvSpPr/>
-          <p:nvPr/>
-        </p:nvSpPr>
-        <p:spPr>
-          <a:xfrm>
-            <a:off x="731520" y="3200400"/>
-            <a:ext cx="7680960" cy="457200"/>
-          </a:xfrm>
-          <a:prstGeom prst="rect">
-            <a:avLst/>
-          </a:prstGeom>
-          <a:noFill/>
-          <a:ln/>
-        </p:spPr>
-        <p:txBody>
-          <a:bodyPr wrap="square" rtlCol="0" anchor="ctr"/>
-          <a:lstStyle/>
-          <a:p>
-            <a:pPr algn="ctr" indent="0" marL="0">
-              <a:buNone/>
-            </a:pPr>
-            <a:r>
-              <a:rPr lang="en-US" sz="1400" dirty="0">
-                <a:solidFill>
-                  <a:srgbClr val="9B9690"/>
+              <a:t>Example: 3x + 5 = 20</a:t>
+            </a:r>
+            <a:endParaRPr lang="en-US" sz="1600" dirty="0"/>
+          </a:p>
+          <a:p>
+            <a:pPr marL="342900" indent="-342900">
+              <a:spcAft>
+                <a:spcPts val="800"/>
+              </a:spcAft>
+              <a:buSzPct val="100000"/>
+              <a:buChar char="•"/>
+            </a:pPr>
+            <a:r>
+              <a:rPr lang="en-US" sz="1600" dirty="0">
+                <a:solidFill>
+                  <a:srgbClr val="3D3A36"/>
                 </a:solidFill>
                 <a:latin typeface="Calibri" pitchFamily="34" charset="0"/>
                 <a:ea typeface="Calibri" pitchFamily="34" charset="-122"/>
                 <a:cs typeface="Calibri" pitchFamily="34" charset="-120"/>
               </a:rPr>
+              <a:t>Step 1: Undo addition → 3x = 15</a:t>
+            </a:r>
+            <a:endParaRPr lang="en-US" sz="1600" dirty="0"/>
+          </a:p>
+          <a:p>
+            <a:pPr marL="342900" indent="-342900">
+              <a:spcAft>
+                <a:spcPts val="800"/>
+              </a:spcAft>
+              <a:buSzPct val="100000"/>
+              <a:buChar char="•"/>
+            </a:pPr>
+            <a:r>
+              <a:rPr lang="en-US" sz="1600" dirty="0">
+                <a:solidFill>
+                  <a:srgbClr val="3D3A36"/>
+                </a:solidFill>
+                <a:latin typeface="Calibri" pitchFamily="34" charset="0"/>
+                <a:ea typeface="Calibri" pitchFamily="34" charset="-122"/>
+                <a:cs typeface="Calibri" pitchFamily="34" charset="-120"/>
+              </a:rPr>
+              <a:t>Step 2: Undo multiplication → x = 5</a:t>
+            </a:r>
+            <a:endParaRPr lang="en-US" sz="1600" dirty="0"/>
+          </a:p>
+          <a:p>
+            <a:pPr marL="342900" indent="-342900">
+              <a:spcAft>
+                <a:spcPts val="800"/>
+              </a:spcAft>
+              <a:buSzPct val="100000"/>
+              <a:buChar char="•"/>
+            </a:pPr>
+            <a:r>
+              <a:rPr lang="en-US" sz="1600" dirty="0">
+                <a:solidFill>
+                  <a:srgbClr val="3D3A36"/>
+                </a:solidFill>
+                <a:latin typeface="Calibri" pitchFamily="34" charset="0"/>
+                <a:ea typeface="Calibri" pitchFamily="34" charset="-122"/>
+                <a:cs typeface="Calibri" pitchFamily="34" charset="-120"/>
+              </a:rPr>
+              <a:t>Deal with + or − FIRST, then × or ÷.</a:t>
+            </a:r>
+            <a:endParaRPr lang="en-US" sz="1600" dirty="0"/>
+          </a:p>
+          <a:p>
+            <a:pPr marL="342900" indent="-342900">
+              <a:spcAft>
+                <a:spcPts val="800"/>
+              </a:spcAft>
+              <a:buSzPct val="100000"/>
+              <a:buChar char="•"/>
+            </a:pPr>
+            <a:r>
+              <a:rPr lang="en-US" sz="1600" dirty="0">
+                <a:solidFill>
+                  <a:srgbClr val="3D3A36"/>
+                </a:solidFill>
+                <a:latin typeface="Calibri" pitchFamily="34" charset="0"/>
+                <a:ea typeface="Calibri" pitchFamily="34" charset="-122"/>
+                <a:cs typeface="Calibri" pitchFamily="34" charset="-120"/>
+              </a:rPr>
+              <a:t>Check: 3(5) + 5 = 20 ✓</a:t>
+            </a:r>
+            <a:endParaRPr lang="en-US" sz="1600" dirty="0"/>
+          </a:p>
+        </p:txBody>
+      </p:sp>
+      <p:sp>
+        <p:nvSpPr>
+          <p:cNvPr id="6" name="Shape 4"/>
+          <p:cNvSpPr/>
+          <p:nvPr/>
+        </p:nvSpPr>
+        <p:spPr>
+          <a:xfrm>
+            <a:off x="640080" y="4114800"/>
+            <a:ext cx="7863840" cy="731520"/>
+          </a:xfrm>
+          <a:prstGeom prst="rect">
+            <a:avLst/>
+          </a:prstGeom>
+          <a:solidFill>
+            <a:srgbClr val="E8F5F3"/>
+          </a:solidFill>
+          <a:ln/>
+          <a:effectLst>
+            <a:outerShdw sx="100000" sy="100000" kx="0" ky="0" algn="bl" rotWithShape="0" blurRad="76200" dist="25400" dir="8100000">
+              <a:srgbClr val="000000">
+                <a:alpha val="12000"/>
+              </a:srgbClr>
+            </a:outerShdw>
+          </a:effectLst>
+        </p:spPr>
+      </p:sp>
+      <p:sp>
+        <p:nvSpPr>
+          <p:cNvPr id="7" name="Shape 5"/>
+          <p:cNvSpPr/>
+          <p:nvPr/>
+        </p:nvSpPr>
+        <p:spPr>
+          <a:xfrm>
+            <a:off x="640080" y="4114800"/>
+            <a:ext cx="64008" cy="731520"/>
+          </a:xfrm>
+          <a:prstGeom prst="rect">
+            <a:avLst/>
+          </a:prstGeom>
+          <a:solidFill>
+            <a:srgbClr val="C8372D"/>
+          </a:solidFill>
+          <a:ln/>
+        </p:spPr>
+      </p:sp>
+      <p:sp>
+        <p:nvSpPr>
+          <p:cNvPr id="8" name="Text 6"/>
+          <p:cNvSpPr/>
+          <p:nvPr/>
+        </p:nvSpPr>
+        <p:spPr>
+          <a:xfrm>
+            <a:off x="914400" y="4160520"/>
+            <a:ext cx="7406640" cy="640080"/>
+          </a:xfrm>
+          <a:prstGeom prst="rect">
+            <a:avLst/>
+          </a:prstGeom>
+          <a:noFill/>
+          <a:ln/>
+        </p:spPr>
+        <p:txBody>
+          <a:bodyPr wrap="square" rtlCol="0" anchor="ctr"/>
+          <a:lstStyle/>
+          <a:p>
+            <a:pPr indent="0" marL="0">
+              <a:buNone/>
+            </a:pPr>
+            <a:r>
+              <a:rPr lang="en-US" sz="1300" i="1" dirty="0">
+                <a:solidFill>
+                  <a:srgbClr val="3D3A36"/>
+                </a:solidFill>
+                <a:latin typeface="Calibri" pitchFamily="34" charset="0"/>
+                <a:ea typeface="Calibri" pitchFamily="34" charset="-122"/>
+                <a:cs typeface="Calibri" pitchFamily="34" charset="-120"/>
+              </a:rPr>
+              <a:t>Baozi problem: 20 + 3b = 47 → 3b = 27 → b = 9. Each baozi costs ¥9.</a:t>
+            </a:r>
+            <a:endParaRPr lang="en-US" sz="1300" dirty="0"/>
+          </a:p>
+        </p:txBody>
+      </p:sp>
+    </p:spTree>
+  </p:cSld>
+  <p:clrMapOvr>
+    <a:masterClrMapping/>
+  </p:clrMapOvr>
+</p:sld>
+</file>
+
+<file path=ppt/slides/slide6.xml><?xml version="1.0" encoding="utf-8"?>
+<p:sld xmlns:a="http://schemas.openxmlformats.org/drawingml/2006/main" xmlns:r="http://schemas.openxmlformats.org/officeDocument/2006/relationships" xmlns:p="http://schemas.openxmlformats.org/presentationml/2006/main">
+  <p:cSld name="Slide 6">
+    <p:bg>
+      <p:bgPr>
+        <a:solidFill>
+          <a:srgbClr val="FAF8F5"/>
+        </a:solidFill>
+      </p:bgPr>
+    </p:bg>
+    <p:spTree>
+      <p:nvGrpSpPr>
+        <p:cNvPr id="1" name=""/>
+        <p:cNvGrpSpPr/>
+        <p:nvPr/>
+      </p:nvGrpSpPr>
+      <p:grpSpPr>
+        <a:xfrm>
+          <a:off x="0" y="0"/>
+          <a:ext cx="0" cy="0"/>
+          <a:chOff x="0" y="0"/>
+          <a:chExt cx="0" cy="0"/>
+        </a:xfrm>
+      </p:grpSpPr>
+      <p:sp>
+        <p:nvSpPr>
+          <p:cNvPr id="2" name="Shape 0"/>
+          <p:cNvSpPr/>
+          <p:nvPr/>
+        </p:nvSpPr>
+        <p:spPr>
+          <a:xfrm>
+            <a:off x="0" y="0"/>
+            <a:ext cx="9144000" cy="822960"/>
+          </a:xfrm>
+          <a:prstGeom prst="rect">
+            <a:avLst/>
+          </a:prstGeom>
+          <a:solidFill>
+            <a:srgbClr val="FFFFFF"/>
+          </a:solidFill>
+          <a:ln/>
+        </p:spPr>
+      </p:sp>
+      <p:sp>
+        <p:nvSpPr>
+          <p:cNvPr id="3" name="Shape 1"/>
+          <p:cNvSpPr/>
+          <p:nvPr/>
+        </p:nvSpPr>
+        <p:spPr>
+          <a:xfrm>
+            <a:off x="0" y="795528"/>
+            <a:ext cx="9144000" cy="27432"/>
+          </a:xfrm>
+          <a:prstGeom prst="rect">
+            <a:avLst/>
+          </a:prstGeom>
+          <a:solidFill>
+            <a:srgbClr val="C8372D"/>
+          </a:solidFill>
+          <a:ln/>
+        </p:spPr>
+      </p:sp>
+      <p:sp>
+        <p:nvSpPr>
+          <p:cNvPr id="4" name="Text 2"/>
+          <p:cNvSpPr/>
+          <p:nvPr/>
+        </p:nvSpPr>
+        <p:spPr>
+          <a:xfrm>
+            <a:off x="640080" y="91440"/>
+            <a:ext cx="7863840" cy="640080"/>
+          </a:xfrm>
+          <a:prstGeom prst="rect">
+            <a:avLst/>
+          </a:prstGeom>
+          <a:noFill/>
+          <a:ln/>
+        </p:spPr>
+        <p:txBody>
+          <a:bodyPr wrap="square" lIns="0" tIns="0" rIns="0" bIns="0" rtlCol="0" anchor="ctr"/>
+          <a:lstStyle/>
+          <a:p>
+            <a:pPr indent="0" marL="0">
+              <a:buNone/>
+            </a:pPr>
+            <a:r>
+              <a:rPr lang="en-US" sz="2200" b="1" dirty="0">
+                <a:solidFill>
+                  <a:srgbClr val="1B2A4A"/>
+                </a:solidFill>
+                <a:latin typeface="Georgia" pitchFamily="34" charset="0"/>
+                <a:ea typeface="Georgia" pitchFamily="34" charset="-122"/>
+                <a:cs typeface="Georgia" pitchFamily="34" charset="-120"/>
+              </a:rPr>
+              <a:t>Variables on Both Sides</a:t>
+            </a:r>
+            <a:endParaRPr lang="en-US" sz="2200" dirty="0"/>
+          </a:p>
+        </p:txBody>
+      </p:sp>
+      <p:sp>
+        <p:nvSpPr>
+          <p:cNvPr id="5" name="Shape 3"/>
+          <p:cNvSpPr/>
+          <p:nvPr/>
+        </p:nvSpPr>
+        <p:spPr>
+          <a:xfrm>
+            <a:off x="457200" y="1005840"/>
+            <a:ext cx="3931920" cy="3657600"/>
+          </a:xfrm>
+          <a:prstGeom prst="rect">
+            <a:avLst/>
+          </a:prstGeom>
+          <a:solidFill>
+            <a:srgbClr val="FFFFFF"/>
+          </a:solidFill>
+          <a:ln/>
+          <a:effectLst>
+            <a:outerShdw sx="100000" sy="100000" kx="0" ky="0" algn="bl" rotWithShape="0" blurRad="76200" dist="25400" dir="8100000">
+              <a:srgbClr val="000000">
+                <a:alpha val="12000"/>
+              </a:srgbClr>
+            </a:outerShdw>
+          </a:effectLst>
+        </p:spPr>
+      </p:sp>
+      <p:sp>
+        <p:nvSpPr>
+          <p:cNvPr id="6" name="Shape 4"/>
+          <p:cNvSpPr/>
+          <p:nvPr/>
+        </p:nvSpPr>
+        <p:spPr>
+          <a:xfrm>
+            <a:off x="457200" y="1005840"/>
+            <a:ext cx="3931920" cy="64008"/>
+          </a:xfrm>
+          <a:prstGeom prst="rect">
+            <a:avLst/>
+          </a:prstGeom>
+          <a:solidFill>
+            <a:srgbClr val="C8372D"/>
+          </a:solidFill>
+          <a:ln/>
+        </p:spPr>
+      </p:sp>
+      <p:sp>
+        <p:nvSpPr>
+          <p:cNvPr id="7" name="Text 5"/>
+          <p:cNvSpPr/>
+          <p:nvPr/>
+        </p:nvSpPr>
+        <p:spPr>
+          <a:xfrm>
+            <a:off x="640080" y="1188720"/>
+            <a:ext cx="3566160" cy="457200"/>
+          </a:xfrm>
+          <a:prstGeom prst="rect">
+            <a:avLst/>
+          </a:prstGeom>
+          <a:noFill/>
+          <a:ln/>
+        </p:spPr>
+        <p:txBody>
+          <a:bodyPr wrap="square" rtlCol="0" anchor="ctr"/>
+          <a:lstStyle/>
+          <a:p>
+            <a:pPr indent="0" marL="0">
+              <a:buNone/>
+            </a:pPr>
+            <a:r>
+              <a:rPr lang="en-US" sz="1600" b="1" dirty="0">
+                <a:solidFill>
+                  <a:srgbClr val="C8372D"/>
+                </a:solidFill>
+                <a:latin typeface="Calibri" pitchFamily="34" charset="0"/>
+                <a:ea typeface="Calibri" pitchFamily="34" charset="-122"/>
+                <a:cs typeface="Calibri" pitchFamily="34" charset="-120"/>
+              </a:rPr>
+              <a:t>Method</a:t>
+            </a:r>
+            <a:endParaRPr lang="en-US" sz="1600" dirty="0"/>
+          </a:p>
+        </p:txBody>
+      </p:sp>
+      <p:sp>
+        <p:nvSpPr>
+          <p:cNvPr id="8" name="Text 6"/>
+          <p:cNvSpPr/>
+          <p:nvPr/>
+        </p:nvSpPr>
+        <p:spPr>
+          <a:xfrm>
+            <a:off x="640080" y="1691640"/>
+            <a:ext cx="3566160" cy="2743200"/>
+          </a:xfrm>
+          <a:prstGeom prst="rect">
+            <a:avLst/>
+          </a:prstGeom>
+          <a:noFill/>
+          <a:ln/>
+        </p:spPr>
+        <p:txBody>
+          <a:bodyPr wrap="square" rtlCol="0" anchor="ctr"/>
+          <a:lstStyle/>
+          <a:p>
+            <a:pPr marL="342900" indent="-342900">
+              <a:spcAft>
+                <a:spcPts val="600"/>
+              </a:spcAft>
+              <a:buSzPct val="100000"/>
+              <a:buChar char="•"/>
+            </a:pPr>
+            <a:r>
+              <a:rPr lang="en-US" sz="1400" dirty="0">
+                <a:solidFill>
+                  <a:srgbClr val="3D3A36"/>
+                </a:solidFill>
+                <a:latin typeface="Calibri" pitchFamily="34" charset="0"/>
+                <a:ea typeface="Calibri" pitchFamily="34" charset="-122"/>
+                <a:cs typeface="Calibri" pitchFamily="34" charset="-120"/>
+              </a:rPr>
+              <a:t>Get all variables on ONE side.</a:t>
+            </a:r>
+            <a:endParaRPr lang="en-US" sz="1400" dirty="0"/>
+          </a:p>
+          <a:p>
+            <a:pPr marL="342900" indent="-342900">
+              <a:spcAft>
+                <a:spcPts val="600"/>
+              </a:spcAft>
+              <a:buSzPct val="100000"/>
+              <a:buChar char="•"/>
+            </a:pPr>
+            <a:r>
+              <a:rPr lang="en-US" sz="1400" dirty="0">
+                <a:solidFill>
+                  <a:srgbClr val="3D3A36"/>
+                </a:solidFill>
+                <a:latin typeface="Calibri" pitchFamily="34" charset="0"/>
+                <a:ea typeface="Calibri" pitchFamily="34" charset="-122"/>
+                <a:cs typeface="Calibri" pitchFamily="34" charset="-120"/>
+              </a:rPr>
+              <a:t>Get all numbers on the OTHER.</a:t>
+            </a:r>
+            <a:endParaRPr lang="en-US" sz="1400" dirty="0"/>
+          </a:p>
+          <a:p>
+            <a:pPr marL="342900" indent="-342900">
+              <a:spcAft>
+                <a:spcPts val="600"/>
+              </a:spcAft>
+              <a:buSzPct val="100000"/>
+              <a:buChar char="•"/>
+            </a:pPr>
+            <a:r>
+              <a:rPr lang="en-US" sz="1400" dirty="0">
+                <a:solidFill>
+                  <a:srgbClr val="3D3A36"/>
+                </a:solidFill>
+                <a:latin typeface="Calibri" pitchFamily="34" charset="0"/>
+                <a:ea typeface="Calibri" pitchFamily="34" charset="-122"/>
+                <a:cs typeface="Calibri" pitchFamily="34" charset="-120"/>
+              </a:rPr>
+              <a:t>Simplify and solve.</a:t>
+            </a:r>
+            <a:endParaRPr lang="en-US" sz="1400" dirty="0"/>
+          </a:p>
+        </p:txBody>
+      </p:sp>
+      <p:sp>
+        <p:nvSpPr>
+          <p:cNvPr id="9" name="Shape 7"/>
+          <p:cNvSpPr/>
+          <p:nvPr/>
+        </p:nvSpPr>
+        <p:spPr>
+          <a:xfrm>
+            <a:off x="4754880" y="1005840"/>
+            <a:ext cx="3931920" cy="3657600"/>
+          </a:xfrm>
+          <a:prstGeom prst="rect">
+            <a:avLst/>
+          </a:prstGeom>
+          <a:solidFill>
+            <a:srgbClr val="FFFFFF"/>
+          </a:solidFill>
+          <a:ln/>
+          <a:effectLst>
+            <a:outerShdw sx="100000" sy="100000" kx="0" ky="0" algn="bl" rotWithShape="0" blurRad="76200" dist="25400" dir="8100000">
+              <a:srgbClr val="000000">
+                <a:alpha val="12000"/>
+              </a:srgbClr>
+            </a:outerShdw>
+          </a:effectLst>
+        </p:spPr>
+      </p:sp>
+      <p:sp>
+        <p:nvSpPr>
+          <p:cNvPr id="10" name="Shape 8"/>
+          <p:cNvSpPr/>
+          <p:nvPr/>
+        </p:nvSpPr>
+        <p:spPr>
+          <a:xfrm>
+            <a:off x="4754880" y="1005840"/>
+            <a:ext cx="3931920" cy="64008"/>
+          </a:xfrm>
+          <a:prstGeom prst="rect">
+            <a:avLst/>
+          </a:prstGeom>
+          <a:solidFill>
+            <a:srgbClr val="E9C46A"/>
+          </a:solidFill>
+          <a:ln/>
+        </p:spPr>
+      </p:sp>
+      <p:sp>
+        <p:nvSpPr>
+          <p:cNvPr id="11" name="Text 9"/>
+          <p:cNvSpPr/>
+          <p:nvPr/>
+        </p:nvSpPr>
+        <p:spPr>
+          <a:xfrm>
+            <a:off x="4937760" y="1188720"/>
+            <a:ext cx="3566160" cy="457200"/>
+          </a:xfrm>
+          <a:prstGeom prst="rect">
+            <a:avLst/>
+          </a:prstGeom>
+          <a:noFill/>
+          <a:ln/>
+        </p:spPr>
+        <p:txBody>
+          <a:bodyPr wrap="square" rtlCol="0" anchor="ctr"/>
+          <a:lstStyle/>
+          <a:p>
+            <a:pPr indent="0" marL="0">
+              <a:buNone/>
+            </a:pPr>
+            <a:r>
+              <a:rPr lang="en-US" sz="1600" b="1" dirty="0">
+                <a:solidFill>
+                  <a:srgbClr val="E9C46A"/>
+                </a:solidFill>
+                <a:latin typeface="Calibri" pitchFamily="34" charset="0"/>
+                <a:ea typeface="Calibri" pitchFamily="34" charset="-122"/>
+                <a:cs typeface="Calibri" pitchFamily="34" charset="-120"/>
+              </a:rPr>
+              <a:t>Example</a:t>
+            </a:r>
+            <a:endParaRPr lang="en-US" sz="1600" dirty="0"/>
+          </a:p>
+        </p:txBody>
+      </p:sp>
+      <p:sp>
+        <p:nvSpPr>
+          <p:cNvPr id="12" name="Text 10"/>
+          <p:cNvSpPr/>
+          <p:nvPr/>
+        </p:nvSpPr>
+        <p:spPr>
+          <a:xfrm>
+            <a:off x="4937760" y="1691640"/>
+            <a:ext cx="3566160" cy="2743200"/>
+          </a:xfrm>
+          <a:prstGeom prst="rect">
+            <a:avLst/>
+          </a:prstGeom>
+          <a:noFill/>
+          <a:ln/>
+        </p:spPr>
+        <p:txBody>
+          <a:bodyPr wrap="square" rtlCol="0" anchor="ctr"/>
+          <a:lstStyle/>
+          <a:p>
+            <a:pPr marL="342900" indent="-342900">
+              <a:spcAft>
+                <a:spcPts val="600"/>
+              </a:spcAft>
+              <a:buSzPct val="100000"/>
+              <a:buChar char="•"/>
+            </a:pPr>
+            <a:r>
+              <a:rPr lang="en-US" sz="1400" dirty="0">
+                <a:solidFill>
+                  <a:srgbClr val="3D3A36"/>
+                </a:solidFill>
+                <a:latin typeface="Calibri" pitchFamily="34" charset="0"/>
+                <a:ea typeface="Calibri" pitchFamily="34" charset="-122"/>
+                <a:cs typeface="Calibri" pitchFamily="34" charset="-120"/>
+              </a:rPr>
+              <a:t>5x + 3 = 2x + 18</a:t>
+            </a:r>
+            <a:endParaRPr lang="en-US" sz="1400" dirty="0"/>
+          </a:p>
+          <a:p>
+            <a:pPr marL="342900" indent="-342900">
+              <a:spcAft>
+                <a:spcPts val="600"/>
+              </a:spcAft>
+              <a:buSzPct val="100000"/>
+              <a:buChar char="•"/>
+            </a:pPr>
+            <a:r>
+              <a:rPr lang="en-US" sz="1400" dirty="0">
+                <a:solidFill>
+                  <a:srgbClr val="3D3A36"/>
+                </a:solidFill>
+                <a:latin typeface="Calibri" pitchFamily="34" charset="0"/>
+                <a:ea typeface="Calibri" pitchFamily="34" charset="-122"/>
+                <a:cs typeface="Calibri" pitchFamily="34" charset="-120"/>
+              </a:rPr>
+              <a:t>Subtract 2x: 3x + 3 = 18</a:t>
+            </a:r>
+            <a:endParaRPr lang="en-US" sz="1400" dirty="0"/>
+          </a:p>
+          <a:p>
+            <a:pPr marL="342900" indent="-342900">
+              <a:spcAft>
+                <a:spcPts val="600"/>
+              </a:spcAft>
+              <a:buSzPct val="100000"/>
+              <a:buChar char="•"/>
+            </a:pPr>
+            <a:r>
+              <a:rPr lang="en-US" sz="1400" dirty="0">
+                <a:solidFill>
+                  <a:srgbClr val="3D3A36"/>
+                </a:solidFill>
+                <a:latin typeface="Calibri" pitchFamily="34" charset="0"/>
+                <a:ea typeface="Calibri" pitchFamily="34" charset="-122"/>
+                <a:cs typeface="Calibri" pitchFamily="34" charset="-120"/>
+              </a:rPr>
+              <a:t>Subtract 3: 3x = 15</a:t>
+            </a:r>
+            <a:endParaRPr lang="en-US" sz="1400" dirty="0"/>
+          </a:p>
+          <a:p>
+            <a:pPr marL="342900" indent="-342900">
+              <a:spcAft>
+                <a:spcPts val="600"/>
+              </a:spcAft>
+              <a:buSzPct val="100000"/>
+              <a:buChar char="•"/>
+            </a:pPr>
+            <a:r>
+              <a:rPr lang="en-US" sz="1400" dirty="0">
+                <a:solidFill>
+                  <a:srgbClr val="3D3A36"/>
+                </a:solidFill>
+                <a:latin typeface="Calibri" pitchFamily="34" charset="0"/>
+                <a:ea typeface="Calibri" pitchFamily="34" charset="-122"/>
+                <a:cs typeface="Calibri" pitchFamily="34" charset="-120"/>
+              </a:rPr>
+              <a:t>Divide by 3: x = 5</a:t>
+            </a:r>
+            <a:endParaRPr lang="en-US" sz="1400" dirty="0"/>
+          </a:p>
+        </p:txBody>
+      </p:sp>
+    </p:spTree>
+  </p:cSld>
+  <p:clrMapOvr>
+    <a:masterClrMapping/>
+  </p:clrMapOvr>
+</p:sld>
+</file>
+
+<file path=ppt/slides/slide7.xml><?xml version="1.0" encoding="utf-8"?>
+<p:sld xmlns:a="http://schemas.openxmlformats.org/drawingml/2006/main" xmlns:r="http://schemas.openxmlformats.org/officeDocument/2006/relationships" xmlns:p="http://schemas.openxmlformats.org/presentationml/2006/main">
+  <p:cSld name="Slide 7">
+    <p:bg>
+      <p:bgPr>
+        <a:solidFill>
+          <a:srgbClr val="FAF8F5"/>
+        </a:solidFill>
+      </p:bgPr>
+    </p:bg>
+    <p:spTree>
+      <p:nvGrpSpPr>
+        <p:cNvPr id="1" name=""/>
+        <p:cNvGrpSpPr/>
+        <p:nvPr/>
+      </p:nvGrpSpPr>
+      <p:grpSpPr>
+        <a:xfrm>
+          <a:off x="0" y="0"/>
+          <a:ext cx="0" cy="0"/>
+          <a:chOff x="0" y="0"/>
+          <a:chExt cx="0" cy="0"/>
+        </a:xfrm>
+      </p:grpSpPr>
+      <p:sp>
+        <p:nvSpPr>
+          <p:cNvPr id="2" name="Shape 0"/>
+          <p:cNvSpPr/>
+          <p:nvPr/>
+        </p:nvSpPr>
+        <p:spPr>
+          <a:xfrm>
+            <a:off x="0" y="0"/>
+            <a:ext cx="9144000" cy="822960"/>
+          </a:xfrm>
+          <a:prstGeom prst="rect">
+            <a:avLst/>
+          </a:prstGeom>
+          <a:solidFill>
+            <a:srgbClr val="FFFFFF"/>
+          </a:solidFill>
+          <a:ln/>
+        </p:spPr>
+      </p:sp>
+      <p:sp>
+        <p:nvSpPr>
+          <p:cNvPr id="3" name="Shape 1"/>
+          <p:cNvSpPr/>
+          <p:nvPr/>
+        </p:nvSpPr>
+        <p:spPr>
+          <a:xfrm>
+            <a:off x="0" y="795528"/>
+            <a:ext cx="9144000" cy="27432"/>
+          </a:xfrm>
+          <a:prstGeom prst="rect">
+            <a:avLst/>
+          </a:prstGeom>
+          <a:solidFill>
+            <a:srgbClr val="C8372D"/>
+          </a:solidFill>
+          <a:ln/>
+        </p:spPr>
+      </p:sp>
+      <p:sp>
+        <p:nvSpPr>
+          <p:cNvPr id="4" name="Text 2"/>
+          <p:cNvSpPr/>
+          <p:nvPr/>
+        </p:nvSpPr>
+        <p:spPr>
+          <a:xfrm>
+            <a:off x="640080" y="91440"/>
+            <a:ext cx="7863840" cy="640080"/>
+          </a:xfrm>
+          <a:prstGeom prst="rect">
+            <a:avLst/>
+          </a:prstGeom>
+          <a:noFill/>
+          <a:ln/>
+        </p:spPr>
+        <p:txBody>
+          <a:bodyPr wrap="square" lIns="0" tIns="0" rIns="0" bIns="0" rtlCol="0" anchor="ctr"/>
+          <a:lstStyle/>
+          <a:p>
+            <a:pPr indent="0" marL="0">
+              <a:buNone/>
+            </a:pPr>
+            <a:r>
+              <a:rPr lang="en-US" sz="2200" b="1" dirty="0">
+                <a:solidFill>
+                  <a:srgbClr val="1B2A4A"/>
+                </a:solidFill>
+                <a:latin typeface="Georgia" pitchFamily="34" charset="0"/>
+                <a:ea typeface="Georgia" pitchFamily="34" charset="-122"/>
+                <a:cs typeface="Georgia" pitchFamily="34" charset="-120"/>
+              </a:rPr>
+              <a:t>Recommended Videos</a:t>
+            </a:r>
+            <a:endParaRPr lang="en-US" sz="2200" dirty="0"/>
+          </a:p>
+        </p:txBody>
+      </p:sp>
+      <p:sp>
+        <p:nvSpPr>
+          <p:cNvPr id="5" name="Text 3"/>
+          <p:cNvSpPr/>
+          <p:nvPr/>
+        </p:nvSpPr>
+        <p:spPr>
+          <a:xfrm>
+            <a:off x="640080" y="868680"/>
+            <a:ext cx="7863840" cy="274320"/>
+          </a:xfrm>
+          <a:prstGeom prst="rect">
+            <a:avLst/>
+          </a:prstGeom>
+          <a:noFill/>
+          <a:ln/>
+        </p:spPr>
+        <p:txBody>
+          <a:bodyPr wrap="square" rtlCol="0" anchor="ctr"/>
+          <a:lstStyle/>
+          <a:p>
+            <a:pPr indent="0" marL="0">
+              <a:buNone/>
+            </a:pPr>
+            <a:r>
+              <a:rPr lang="en-US" sz="1200" i="1" dirty="0">
+                <a:solidFill>
+                  <a:srgbClr val="6B6660"/>
+                </a:solidFill>
+                <a:latin typeface="Calibri" pitchFamily="34" charset="0"/>
+                <a:ea typeface="Calibri" pitchFamily="34" charset="-122"/>
+                <a:cs typeface="Calibri" pitchFamily="34" charset="-120"/>
+              </a:rPr>
+              <a:t>Search these on YouTube to learn more.</a:t>
+            </a:r>
+            <a:endParaRPr lang="en-US" sz="1200" dirty="0"/>
+          </a:p>
+        </p:txBody>
+      </p:sp>
+      <p:sp>
+        <p:nvSpPr>
+          <p:cNvPr id="6" name="Shape 4"/>
+          <p:cNvSpPr/>
+          <p:nvPr/>
+        </p:nvSpPr>
+        <p:spPr>
+          <a:xfrm>
+            <a:off x="457200" y="1234440"/>
+            <a:ext cx="8229600" cy="1051560"/>
+          </a:xfrm>
+          <a:prstGeom prst="rect">
+            <a:avLst/>
+          </a:prstGeom>
+          <a:solidFill>
+            <a:srgbClr val="FFFFFF"/>
+          </a:solidFill>
+          <a:ln/>
+          <a:effectLst>
+            <a:outerShdw sx="100000" sy="100000" kx="0" ky="0" algn="bl" rotWithShape="0" blurRad="76200" dist="25400" dir="8100000">
+              <a:srgbClr val="000000">
+                <a:alpha val="12000"/>
+              </a:srgbClr>
+            </a:outerShdw>
+          </a:effectLst>
+        </p:spPr>
+      </p:sp>
+      <p:sp>
+        <p:nvSpPr>
+          <p:cNvPr id="7" name="Shape 5"/>
+          <p:cNvSpPr/>
+          <p:nvPr/>
+        </p:nvSpPr>
+        <p:spPr>
+          <a:xfrm>
+            <a:off x="457200" y="1234440"/>
+            <a:ext cx="64008" cy="1051560"/>
+          </a:xfrm>
+          <a:prstGeom prst="rect">
+            <a:avLst/>
+          </a:prstGeom>
+          <a:solidFill>
+            <a:srgbClr val="C8372D"/>
+          </a:solidFill>
+          <a:ln/>
+        </p:spPr>
+      </p:sp>
+      <p:sp>
+        <p:nvSpPr>
+          <p:cNvPr id="8" name="Text 6"/>
+          <p:cNvSpPr/>
+          <p:nvPr/>
+        </p:nvSpPr>
+        <p:spPr>
+          <a:xfrm>
+            <a:off x="640080" y="1325880"/>
+            <a:ext cx="457200" cy="457200"/>
+          </a:xfrm>
+          <a:prstGeom prst="rect">
+            <a:avLst/>
+          </a:prstGeom>
+          <a:noFill/>
+          <a:ln/>
+        </p:spPr>
+        <p:txBody>
+          <a:bodyPr wrap="square" rtlCol="0" anchor="ctr"/>
+          <a:lstStyle/>
+          <a:p>
+            <a:pPr algn="ctr" indent="0" marL="0">
+              <a:buNone/>
+            </a:pPr>
+            <a:r>
+              <a:rPr lang="en-US" sz="2000" dirty="0">
+                <a:solidFill>
+                  <a:srgbClr val="C8372D"/>
+                </a:solidFill>
+                <a:latin typeface="Calibri" pitchFamily="34" charset="0"/>
+                <a:ea typeface="Calibri" pitchFamily="34" charset="-122"/>
+                <a:cs typeface="Calibri" pitchFamily="34" charset="-120"/>
+              </a:rPr>
+              <a:t>▶</a:t>
+            </a:r>
+            <a:endParaRPr lang="en-US" sz="2000" dirty="0"/>
+          </a:p>
+        </p:txBody>
+      </p:sp>
+      <p:sp>
+        <p:nvSpPr>
+          <p:cNvPr id="9" name="Text 7"/>
+          <p:cNvSpPr/>
+          <p:nvPr/>
+        </p:nvSpPr>
+        <p:spPr>
+          <a:xfrm>
+            <a:off x="1188720" y="1307592"/>
+            <a:ext cx="7132320" cy="411480"/>
+          </a:xfrm>
+          <a:prstGeom prst="rect">
+            <a:avLst/>
+          </a:prstGeom>
+          <a:noFill/>
+          <a:ln/>
+        </p:spPr>
+        <p:txBody>
+          <a:bodyPr wrap="square" rtlCol="0" anchor="ctr"/>
+          <a:lstStyle/>
+          <a:p>
+            <a:pPr indent="0" marL="0">
+              <a:buNone/>
+            </a:pPr>
+            <a:r>
+              <a:rPr lang="en-US" sz="1400" b="1" dirty="0">
+                <a:solidFill>
+                  <a:srgbClr val="1B2A4A"/>
+                </a:solidFill>
+                <a:latin typeface="Calibri" pitchFamily="34" charset="0"/>
+                <a:ea typeface="Calibri" pitchFamily="34" charset="-122"/>
+                <a:cs typeface="Calibri" pitchFamily="34" charset="-120"/>
+              </a:rPr>
+              <a:t>Solving One-Step Equations</a:t>
+            </a:r>
+            <a:endParaRPr lang="en-US" sz="1400" dirty="0"/>
+          </a:p>
+        </p:txBody>
+      </p:sp>
+      <p:sp>
+        <p:nvSpPr>
+          <p:cNvPr id="10" name="Text 8"/>
+          <p:cNvSpPr/>
+          <p:nvPr/>
+        </p:nvSpPr>
+        <p:spPr>
+          <a:xfrm>
+            <a:off x="1188720" y="1691640"/>
+            <a:ext cx="7132320" cy="320040"/>
+          </a:xfrm>
+          <a:prstGeom prst="rect">
+            <a:avLst/>
+          </a:prstGeom>
+          <a:noFill/>
+          <a:ln/>
+        </p:spPr>
+        <p:txBody>
+          <a:bodyPr wrap="square" rtlCol="0" anchor="ctr"/>
+          <a:lstStyle/>
+          <a:p>
+            <a:pPr indent="0" marL="0">
+              <a:buNone/>
+            </a:pPr>
+            <a:r>
+              <a:rPr lang="en-US" sz="1100" dirty="0">
+                <a:solidFill>
+                  <a:srgbClr val="6B6660"/>
+                </a:solidFill>
+                <a:latin typeface="Calibri" pitchFamily="34" charset="0"/>
+                <a:ea typeface="Calibri" pitchFamily="34" charset="-122"/>
+                <a:cs typeface="Calibri" pitchFamily="34" charset="-120"/>
+              </a:rPr>
+              <a:t>Math Antics  •  8 min</a:t>
+            </a:r>
+            <a:endParaRPr lang="en-US" sz="1100" dirty="0"/>
+          </a:p>
+        </p:txBody>
+      </p:sp>
+      <p:sp>
+        <p:nvSpPr>
+          <p:cNvPr id="11" name="Shape 9"/>
+          <p:cNvSpPr/>
+          <p:nvPr/>
+        </p:nvSpPr>
+        <p:spPr>
+          <a:xfrm>
+            <a:off x="457200" y="2423160"/>
+            <a:ext cx="8229600" cy="1051560"/>
+          </a:xfrm>
+          <a:prstGeom prst="rect">
+            <a:avLst/>
+          </a:prstGeom>
+          <a:solidFill>
+            <a:srgbClr val="FFFFFF"/>
+          </a:solidFill>
+          <a:ln/>
+          <a:effectLst>
+            <a:outerShdw sx="100000" sy="100000" kx="0" ky="0" algn="bl" rotWithShape="0" blurRad="76200" dist="25400" dir="8100000">
+              <a:srgbClr val="000000">
+                <a:alpha val="12000"/>
+              </a:srgbClr>
+            </a:outerShdw>
+          </a:effectLst>
+        </p:spPr>
+      </p:sp>
+      <p:sp>
+        <p:nvSpPr>
+          <p:cNvPr id="12" name="Shape 10"/>
+          <p:cNvSpPr/>
+          <p:nvPr/>
+        </p:nvSpPr>
+        <p:spPr>
+          <a:xfrm>
+            <a:off x="457200" y="2423160"/>
+            <a:ext cx="64008" cy="1051560"/>
+          </a:xfrm>
+          <a:prstGeom prst="rect">
+            <a:avLst/>
+          </a:prstGeom>
+          <a:solidFill>
+            <a:srgbClr val="C8372D"/>
+          </a:solidFill>
+          <a:ln/>
+        </p:spPr>
+      </p:sp>
+      <p:sp>
+        <p:nvSpPr>
+          <p:cNvPr id="13" name="Text 11"/>
+          <p:cNvSpPr/>
+          <p:nvPr/>
+        </p:nvSpPr>
+        <p:spPr>
+          <a:xfrm>
+            <a:off x="640080" y="2514600"/>
+            <a:ext cx="457200" cy="457200"/>
+          </a:xfrm>
+          <a:prstGeom prst="rect">
+            <a:avLst/>
+          </a:prstGeom>
+          <a:noFill/>
+          <a:ln/>
+        </p:spPr>
+        <p:txBody>
+          <a:bodyPr wrap="square" rtlCol="0" anchor="ctr"/>
+          <a:lstStyle/>
+          <a:p>
+            <a:pPr algn="ctr" indent="0" marL="0">
+              <a:buNone/>
+            </a:pPr>
+            <a:r>
+              <a:rPr lang="en-US" sz="2000" dirty="0">
+                <a:solidFill>
+                  <a:srgbClr val="C8372D"/>
+                </a:solidFill>
+                <a:latin typeface="Calibri" pitchFamily="34" charset="0"/>
+                <a:ea typeface="Calibri" pitchFamily="34" charset="-122"/>
+                <a:cs typeface="Calibri" pitchFamily="34" charset="-120"/>
+              </a:rPr>
+              <a:t>▶</a:t>
+            </a:r>
+            <a:endParaRPr lang="en-US" sz="2000" dirty="0"/>
+          </a:p>
+        </p:txBody>
+      </p:sp>
+      <p:sp>
+        <p:nvSpPr>
+          <p:cNvPr id="14" name="Text 12"/>
+          <p:cNvSpPr/>
+          <p:nvPr/>
+        </p:nvSpPr>
+        <p:spPr>
+          <a:xfrm>
+            <a:off x="1188720" y="2496312"/>
+            <a:ext cx="7132320" cy="411480"/>
+          </a:xfrm>
+          <a:prstGeom prst="rect">
+            <a:avLst/>
+          </a:prstGeom>
+          <a:noFill/>
+          <a:ln/>
+        </p:spPr>
+        <p:txBody>
+          <a:bodyPr wrap="square" rtlCol="0" anchor="ctr"/>
+          <a:lstStyle/>
+          <a:p>
+            <a:pPr indent="0" marL="0">
+              <a:buNone/>
+            </a:pPr>
+            <a:r>
+              <a:rPr lang="en-US" sz="1400" b="1" dirty="0">
+                <a:solidFill>
+                  <a:srgbClr val="1B2A4A"/>
+                </a:solidFill>
+                <a:latin typeface="Calibri" pitchFamily="34" charset="0"/>
+                <a:ea typeface="Calibri" pitchFamily="34" charset="-122"/>
+                <a:cs typeface="Calibri" pitchFamily="34" charset="-120"/>
+              </a:rPr>
+              <a:t>Solving Two-Step Equations</a:t>
+            </a:r>
+            <a:endParaRPr lang="en-US" sz="1400" dirty="0"/>
+          </a:p>
+        </p:txBody>
+      </p:sp>
+      <p:sp>
+        <p:nvSpPr>
+          <p:cNvPr id="15" name="Text 13"/>
+          <p:cNvSpPr/>
+          <p:nvPr/>
+        </p:nvSpPr>
+        <p:spPr>
+          <a:xfrm>
+            <a:off x="1188720" y="2880360"/>
+            <a:ext cx="7132320" cy="320040"/>
+          </a:xfrm>
+          <a:prstGeom prst="rect">
+            <a:avLst/>
+          </a:prstGeom>
+          <a:noFill/>
+          <a:ln/>
+        </p:spPr>
+        <p:txBody>
+          <a:bodyPr wrap="square" rtlCol="0" anchor="ctr"/>
+          <a:lstStyle/>
+          <a:p>
+            <a:pPr indent="0" marL="0">
+              <a:buNone/>
+            </a:pPr>
+            <a:r>
+              <a:rPr lang="en-US" sz="1100" dirty="0">
+                <a:solidFill>
+                  <a:srgbClr val="6B6660"/>
+                </a:solidFill>
+                <a:latin typeface="Calibri" pitchFamily="34" charset="0"/>
+                <a:ea typeface="Calibri" pitchFamily="34" charset="-122"/>
+                <a:cs typeface="Calibri" pitchFamily="34" charset="-120"/>
+              </a:rPr>
+              <a:t>Corbettmaths  •  5 min</a:t>
+            </a:r>
+            <a:endParaRPr lang="en-US" sz="1100" dirty="0"/>
+          </a:p>
+        </p:txBody>
+      </p:sp>
+      <p:sp>
+        <p:nvSpPr>
+          <p:cNvPr id="16" name="Shape 14"/>
+          <p:cNvSpPr/>
+          <p:nvPr/>
+        </p:nvSpPr>
+        <p:spPr>
+          <a:xfrm>
+            <a:off x="457200" y="3611880"/>
+            <a:ext cx="8229600" cy="1051560"/>
+          </a:xfrm>
+          <a:prstGeom prst="rect">
+            <a:avLst/>
+          </a:prstGeom>
+          <a:solidFill>
+            <a:srgbClr val="FFFFFF"/>
+          </a:solidFill>
+          <a:ln/>
+          <a:effectLst>
+            <a:outerShdw sx="100000" sy="100000" kx="0" ky="0" algn="bl" rotWithShape="0" blurRad="76200" dist="25400" dir="8100000">
+              <a:srgbClr val="000000">
+                <a:alpha val="12000"/>
+              </a:srgbClr>
+            </a:outerShdw>
+          </a:effectLst>
+        </p:spPr>
+      </p:sp>
+      <p:sp>
+        <p:nvSpPr>
+          <p:cNvPr id="17" name="Shape 15"/>
+          <p:cNvSpPr/>
+          <p:nvPr/>
+        </p:nvSpPr>
+        <p:spPr>
+          <a:xfrm>
+            <a:off x="457200" y="3611880"/>
+            <a:ext cx="64008" cy="1051560"/>
+          </a:xfrm>
+          <a:prstGeom prst="rect">
+            <a:avLst/>
+          </a:prstGeom>
+          <a:solidFill>
+            <a:srgbClr val="C8372D"/>
+          </a:solidFill>
+          <a:ln/>
+        </p:spPr>
+      </p:sp>
+      <p:sp>
+        <p:nvSpPr>
+          <p:cNvPr id="18" name="Text 16"/>
+          <p:cNvSpPr/>
+          <p:nvPr/>
+        </p:nvSpPr>
+        <p:spPr>
+          <a:xfrm>
+            <a:off x="640080" y="3703320"/>
+            <a:ext cx="457200" cy="457200"/>
+          </a:xfrm>
+          <a:prstGeom prst="rect">
+            <a:avLst/>
+          </a:prstGeom>
+          <a:noFill/>
+          <a:ln/>
+        </p:spPr>
+        <p:txBody>
+          <a:bodyPr wrap="square" rtlCol="0" anchor="ctr"/>
+          <a:lstStyle/>
+          <a:p>
+            <a:pPr algn="ctr" indent="0" marL="0">
+              <a:buNone/>
+            </a:pPr>
+            <a:r>
+              <a:rPr lang="en-US" sz="2000" dirty="0">
+                <a:solidFill>
+                  <a:srgbClr val="C8372D"/>
+                </a:solidFill>
+                <a:latin typeface="Calibri" pitchFamily="34" charset="0"/>
+                <a:ea typeface="Calibri" pitchFamily="34" charset="-122"/>
+                <a:cs typeface="Calibri" pitchFamily="34" charset="-120"/>
+              </a:rPr>
+              <a:t>▶</a:t>
+            </a:r>
+            <a:endParaRPr lang="en-US" sz="2000" dirty="0"/>
+          </a:p>
+        </p:txBody>
+      </p:sp>
+      <p:sp>
+        <p:nvSpPr>
+          <p:cNvPr id="19" name="Text 17"/>
+          <p:cNvSpPr/>
+          <p:nvPr/>
+        </p:nvSpPr>
+        <p:spPr>
+          <a:xfrm>
+            <a:off x="1188720" y="3685032"/>
+            <a:ext cx="7132320" cy="411480"/>
+          </a:xfrm>
+          <a:prstGeom prst="rect">
+            <a:avLst/>
+          </a:prstGeom>
+          <a:noFill/>
+          <a:ln/>
+        </p:spPr>
+        <p:txBody>
+          <a:bodyPr wrap="square" rtlCol="0" anchor="ctr"/>
+          <a:lstStyle/>
+          <a:p>
+            <a:pPr indent="0" marL="0">
+              <a:buNone/>
+            </a:pPr>
+            <a:r>
+              <a:rPr lang="en-US" sz="1400" b="1" dirty="0">
+                <a:solidFill>
+                  <a:srgbClr val="1B2A4A"/>
+                </a:solidFill>
+                <a:latin typeface="Calibri" pitchFamily="34" charset="0"/>
+                <a:ea typeface="Calibri" pitchFamily="34" charset="-122"/>
+                <a:cs typeface="Calibri" pitchFamily="34" charset="-120"/>
+              </a:rPr>
+              <a:t>Equations with Variables on Both Sides</a:t>
+            </a:r>
+            <a:endParaRPr lang="en-US" sz="1400" dirty="0"/>
+          </a:p>
+        </p:txBody>
+      </p:sp>
+      <p:sp>
+        <p:nvSpPr>
+          <p:cNvPr id="20" name="Text 18"/>
+          <p:cNvSpPr/>
+          <p:nvPr/>
+        </p:nvSpPr>
+        <p:spPr>
+          <a:xfrm>
+            <a:off x="1188720" y="4069080"/>
+            <a:ext cx="7132320" cy="320040"/>
+          </a:xfrm>
+          <a:prstGeom prst="rect">
+            <a:avLst/>
+          </a:prstGeom>
+          <a:noFill/>
+          <a:ln/>
+        </p:spPr>
+        <p:txBody>
+          <a:bodyPr wrap="square" rtlCol="0" anchor="ctr"/>
+          <a:lstStyle/>
+          <a:p>
+            <a:pPr indent="0" marL="0">
+              <a:buNone/>
+            </a:pPr>
+            <a:r>
+              <a:rPr lang="en-US" sz="1100" dirty="0">
+                <a:solidFill>
+                  <a:srgbClr val="6B6660"/>
+                </a:solidFill>
+                <a:latin typeface="Calibri" pitchFamily="34" charset="0"/>
+                <a:ea typeface="Calibri" pitchFamily="34" charset="-122"/>
+                <a:cs typeface="Calibri" pitchFamily="34" charset="-120"/>
+              </a:rPr>
+              <a:t>Cognito  •  5 min</a:t>
+            </a:r>
+            <a:endParaRPr lang="en-US" sz="1100" dirty="0"/>
+          </a:p>
+        </p:txBody>
+      </p:sp>
+    </p:spTree>
+  </p:cSld>
+  <p:clrMapOvr>
+    <a:masterClrMapping/>
+  </p:clrMapOvr>
+</p:sld>
+</file>
+
+<file path=ppt/slides/slide8.xml><?xml version="1.0" encoding="utf-8"?>
+<p:sld xmlns:a="http://schemas.openxmlformats.org/drawingml/2006/main" xmlns:r="http://schemas.openxmlformats.org/officeDocument/2006/relationships" xmlns:p="http://schemas.openxmlformats.org/presentationml/2006/main">
+  <p:cSld name="Slide 8">
+    <p:spTree>
+      <p:nvGrpSpPr>
+        <p:cNvPr id="1" name=""/>
+        <p:cNvGrpSpPr/>
+        <p:nvPr/>
+      </p:nvGrpSpPr>
+      <p:grpSpPr>
+        <a:xfrm>
+          <a:off x="0" y="0"/>
+          <a:ext cx="0" cy="0"/>
+          <a:chOff x="0" y="0"/>
+          <a:chExt cx="0" cy="0"/>
+        </a:xfrm>
+      </p:grpSpPr>
+      <p:sp>
+        <p:nvSpPr>
+          <p:cNvPr id="2" name="Shape 0"/>
+          <p:cNvSpPr/>
+          <p:nvPr/>
+        </p:nvSpPr>
+        <p:spPr>
+          <a:xfrm>
+            <a:off x="0" y="0"/>
+            <a:ext cx="9144000" cy="5143500"/>
+          </a:xfrm>
+          <a:prstGeom prst="rect">
+            <a:avLst/>
+          </a:prstGeom>
+          <a:solidFill>
+            <a:srgbClr val="1B2A4A"/>
+          </a:solidFill>
+          <a:ln/>
+        </p:spPr>
+      </p:sp>
+      <p:sp>
+        <p:nvSpPr>
+          <p:cNvPr id="3" name="Shape 1"/>
+          <p:cNvSpPr/>
+          <p:nvPr/>
+        </p:nvSpPr>
+        <p:spPr>
+          <a:xfrm>
+            <a:off x="0" y="4777740"/>
+            <a:ext cx="9144000" cy="365760"/>
+          </a:xfrm>
+          <a:prstGeom prst="rect">
+            <a:avLst/>
+          </a:prstGeom>
+          <a:solidFill>
+            <a:srgbClr val="C8372D"/>
+          </a:solidFill>
+          <a:ln/>
+        </p:spPr>
+      </p:sp>
+      <p:sp>
+        <p:nvSpPr>
+          <p:cNvPr id="4" name="Text 2"/>
+          <p:cNvSpPr/>
+          <p:nvPr/>
+        </p:nvSpPr>
+        <p:spPr>
+          <a:xfrm>
+            <a:off x="731520" y="1371600"/>
+            <a:ext cx="7680960" cy="914400"/>
+          </a:xfrm>
+          <a:prstGeom prst="rect">
+            <a:avLst/>
+          </a:prstGeom>
+          <a:noFill/>
+          <a:ln/>
+        </p:spPr>
+        <p:txBody>
+          <a:bodyPr wrap="square" rtlCol="0" anchor="ctr"/>
+          <a:lstStyle/>
+          <a:p>
+            <a:pPr algn="ctr" indent="0" marL="0">
+              <a:buNone/>
+            </a:pPr>
+            <a:r>
+              <a:rPr lang="en-US" sz="3600" b="1" dirty="0">
+                <a:solidFill>
+                  <a:srgbClr val="FFFFFF"/>
+                </a:solidFill>
+                <a:latin typeface="Georgia" pitchFamily="34" charset="0"/>
+                <a:ea typeface="Georgia" pitchFamily="34" charset="-122"/>
+                <a:cs typeface="Georgia" pitchFamily="34" charset="-120"/>
+              </a:rPr>
+              <a:t>Review &amp; Practise</a:t>
+            </a:r>
+            <a:endParaRPr lang="en-US" sz="3600" dirty="0"/>
+          </a:p>
+        </p:txBody>
+      </p:sp>
+      <p:sp>
+        <p:nvSpPr>
+          <p:cNvPr id="5" name="Text 3"/>
+          <p:cNvSpPr/>
+          <p:nvPr/>
+        </p:nvSpPr>
+        <p:spPr>
+          <a:xfrm>
+            <a:off x="731520" y="2560320"/>
+            <a:ext cx="7680960" cy="548640"/>
+          </a:xfrm>
+          <a:prstGeom prst="rect">
+            <a:avLst/>
+          </a:prstGeom>
+          <a:noFill/>
+          <a:ln/>
+        </p:spPr>
+        <p:txBody>
+          <a:bodyPr wrap="square" rtlCol="0" anchor="ctr"/>
+          <a:lstStyle/>
+          <a:p>
+            <a:pPr algn="ctr" indent="0" marL="0">
+              <a:buNone/>
+            </a:pPr>
+            <a:r>
+              <a:rPr lang="en-US" sz="2000" dirty="0">
+                <a:solidFill>
+                  <a:srgbClr val="C8372D"/>
+                </a:solidFill>
+                <a:latin typeface="Calibri" pitchFamily="34" charset="0"/>
+                <a:ea typeface="Calibri" pitchFamily="34" charset="-122"/>
+                <a:cs typeface="Calibri" pitchFamily="34" charset="-120"/>
+              </a:rPr>
               <a:t>mrzocchi.com</a:t>
             </a:r>
-            <a:endParaRPr lang="en-US" sz="1400" dirty="0"/>
+            <a:endParaRPr lang="en-US" sz="2000" dirty="0"/>
           </a:p>
         </p:txBody>
       </p:sp>
